--- a/2026-Q2/11-SovereigntyOfGod-Ch8-11/2026-06-21-Romans-Ch8-11.pptx
+++ b/2026-Q2/11-SovereigntyOfGod-Ch8-11/2026-06-21-Romans-Ch8-11.pptx
@@ -11,8 +11,8 @@
   <p:sldIdLst>
     <p:sldId id="256" r:id="rId3"/>
     <p:sldId id="389" r:id="rId4"/>
-    <p:sldId id="394" r:id="rId5"/>
-    <p:sldId id="393" r:id="rId6"/>
+    <p:sldId id="393" r:id="rId5"/>
+    <p:sldId id="394" r:id="rId6"/>
     <p:sldId id="386" r:id="rId7"/>
     <p:sldId id="388" r:id="rId8"/>
     <p:sldId id="397" r:id="rId9"/>
@@ -270,7 +270,7 @@
               <a:pPr>
                 <a:defRPr/>
               </a:pPr>
-              <a:t>6/20/2026</a:t>
+              <a:t>6/21/26</a:t>
             </a:fld>
             <a:endParaRPr lang="en-US"/>
           </a:p>
@@ -912,6 +912,710 @@
         <p:cNvPr id="1" name="">
           <a:extLst>
             <a:ext uri="{FF2B5EF4-FFF2-40B4-BE49-F238E27FC236}">
+              <a16:creationId xmlns:a16="http://schemas.microsoft.com/office/drawing/2014/main" id="{DC93114B-654F-892D-4761-4F9E4A88ACB3}"/>
+            </a:ext>
+          </a:extLst>
+        </p:cNvPr>
+        <p:cNvGrpSpPr/>
+        <p:nvPr/>
+      </p:nvGrpSpPr>
+      <p:grpSpPr>
+        <a:xfrm>
+          <a:off x="0" y="0"/>
+          <a:ext cx="0" cy="0"/>
+          <a:chOff x="0" y="0"/>
+          <a:chExt cx="0" cy="0"/>
+        </a:xfrm>
+      </p:grpSpPr>
+      <p:sp>
+        <p:nvSpPr>
+          <p:cNvPr id="2" name="Slide Image Placeholder 1">
+            <a:extLst>
+              <a:ext uri="{FF2B5EF4-FFF2-40B4-BE49-F238E27FC236}">
+                <a16:creationId xmlns:a16="http://schemas.microsoft.com/office/drawing/2014/main" id="{493F4753-5F2C-080A-DC80-172615607A5A}"/>
+              </a:ext>
+            </a:extLst>
+          </p:cNvPr>
+          <p:cNvSpPr>
+            <a:spLocks noGrp="1" noRot="1" noChangeAspect="1"/>
+          </p:cNvSpPr>
+          <p:nvPr>
+            <p:ph type="sldImg"/>
+          </p:nvPr>
+        </p:nvSpPr>
+        <p:spPr/>
+      </p:sp>
+      <p:sp>
+        <p:nvSpPr>
+          <p:cNvPr id="3" name="Notes Placeholder 2">
+            <a:extLst>
+              <a:ext uri="{FF2B5EF4-FFF2-40B4-BE49-F238E27FC236}">
+                <a16:creationId xmlns:a16="http://schemas.microsoft.com/office/drawing/2014/main" id="{F44C299B-9D30-22A1-BE08-AF9B57B86F96}"/>
+              </a:ext>
+            </a:extLst>
+          </p:cNvPr>
+          <p:cNvSpPr>
+            <a:spLocks noGrp="1"/>
+          </p:cNvSpPr>
+          <p:nvPr>
+            <p:ph type="body" idx="1"/>
+          </p:nvPr>
+        </p:nvSpPr>
+        <p:spPr/>
+        <p:txBody>
+          <a:bodyPr>
+            <a:normAutofit fontScale="47500" lnSpcReduction="20000"/>
+          </a:bodyPr>
+          <a:lstStyle/>
+          <a:p>
+            <a:pPr marL="0" marR="0" lvl="0" indent="0" algn="l" defTabSz="914400" rtl="0" eaLnBrk="0" fontAlgn="base" latinLnBrk="0" hangingPunct="0">
+              <a:lnSpc>
+                <a:spcPct val="100000"/>
+              </a:lnSpc>
+              <a:spcBef>
+                <a:spcPct val="30000"/>
+              </a:spcBef>
+              <a:spcAft>
+                <a:spcPct val="0"/>
+              </a:spcAft>
+              <a:buClrTx/>
+              <a:buSzTx/>
+              <a:buFontTx/>
+              <a:buNone/>
+              <a:tabLst/>
+              <a:defRPr/>
+            </a:pPr>
+            <a:r>
+              <a:rPr lang="en-US" sz="1400" b="1" kern="1200" dirty="0">
+                <a:solidFill>
+                  <a:schemeClr val="tx1"/>
+                </a:solidFill>
+                <a:effectLst/>
+                <a:latin typeface="+mn-lt"/>
+                <a:ea typeface="ＭＳ Ｐゴシック" pitchFamily="-106" charset="-128"/>
+                <a:cs typeface="ＭＳ Ｐゴシック" pitchFamily="-106" charset="-128"/>
+              </a:rPr>
+              <a:t>The Will of Man and the Sovereignty of God - working together</a:t>
+            </a:r>
+          </a:p>
+          <a:p>
+            <a:endParaRPr lang="en-US" sz="1400" b="1" kern="1200" dirty="0">
+              <a:solidFill>
+                <a:schemeClr val="tx1"/>
+              </a:solidFill>
+              <a:effectLst/>
+              <a:latin typeface="+mn-lt"/>
+              <a:ea typeface="ＭＳ Ｐゴシック" pitchFamily="-106" charset="-128"/>
+              <a:cs typeface="ＭＳ Ｐゴシック" pitchFamily="-106" charset="-128"/>
+            </a:endParaRPr>
+          </a:p>
+          <a:p>
+            <a:r>
+              <a:rPr lang="en-US" sz="1400" b="1" kern="1200" dirty="0">
+                <a:solidFill>
+                  <a:schemeClr val="tx1"/>
+                </a:solidFill>
+                <a:effectLst/>
+                <a:latin typeface="+mn-lt"/>
+                <a:ea typeface="ＭＳ Ｐゴシック" pitchFamily="-106" charset="-128"/>
+                <a:cs typeface="ＭＳ Ｐゴシック" pitchFamily="-106" charset="-128"/>
+              </a:rPr>
+              <a:t>Double </a:t>
+            </a:r>
+            <a:r>
+              <a:rPr lang="en-US" sz="1400" b="1" kern="1200" dirty="0" err="1">
+                <a:solidFill>
+                  <a:schemeClr val="tx1"/>
+                </a:solidFill>
+                <a:effectLst/>
+                <a:latin typeface="+mn-lt"/>
+                <a:ea typeface="ＭＳ Ｐゴシック" pitchFamily="-106" charset="-128"/>
+                <a:cs typeface="ＭＳ Ｐゴシック" pitchFamily="-106" charset="-128"/>
+              </a:rPr>
+              <a:t>PreDestination</a:t>
+            </a:r>
+            <a:r>
+              <a:rPr lang="en-US" sz="1400" b="1" kern="1200" dirty="0">
+                <a:solidFill>
+                  <a:schemeClr val="tx1"/>
+                </a:solidFill>
+                <a:effectLst/>
+                <a:latin typeface="+mn-lt"/>
+                <a:ea typeface="ＭＳ Ｐゴシック" pitchFamily="-106" charset="-128"/>
+                <a:cs typeface="ＭＳ Ｐゴシック" pitchFamily="-106" charset="-128"/>
+              </a:rPr>
+              <a:t>:</a:t>
+            </a:r>
+          </a:p>
+          <a:p>
+            <a:pPr marL="171450" indent="-171450" rtl="0" fontAlgn="ctr">
+              <a:buFont typeface="Arial" panose="020B0604020202020204" pitchFamily="34" charset="0"/>
+              <a:buChar char="•"/>
+            </a:pPr>
+            <a:r>
+              <a:rPr lang="en-US" sz="1400" b="0" i="0" kern="1200" dirty="0">
+                <a:solidFill>
+                  <a:schemeClr val="tx1"/>
+                </a:solidFill>
+                <a:effectLst/>
+                <a:latin typeface="+mn-lt"/>
+                <a:ea typeface="ＭＳ Ｐゴシック" pitchFamily="-106" charset="-128"/>
+                <a:cs typeface="ＭＳ Ｐゴシック" pitchFamily="-106" charset="-128"/>
+              </a:rPr>
+              <a:t>Belief equals predestination to salvation.</a:t>
+            </a:r>
+          </a:p>
+          <a:p>
+            <a:pPr marL="171450" indent="-171450" rtl="0" fontAlgn="ctr">
+              <a:buFont typeface="Arial" panose="020B0604020202020204" pitchFamily="34" charset="0"/>
+              <a:buChar char="•"/>
+            </a:pPr>
+            <a:r>
+              <a:rPr lang="en-US" sz="1400" b="0" i="0" kern="1200" dirty="0">
+                <a:solidFill>
+                  <a:schemeClr val="tx1"/>
+                </a:solidFill>
+                <a:effectLst/>
+                <a:latin typeface="+mn-lt"/>
+                <a:ea typeface="ＭＳ Ｐゴシック" pitchFamily="-106" charset="-128"/>
+                <a:cs typeface="ＭＳ Ｐゴシック" pitchFamily="-106" charset="-128"/>
+              </a:rPr>
+              <a:t>Disbelief equals predestination to stumble further.</a:t>
+            </a:r>
+          </a:p>
+          <a:p>
+            <a:r>
+              <a:rPr lang="en-US" sz="1400" kern="1200" dirty="0">
+                <a:solidFill>
+                  <a:schemeClr val="tx1"/>
+                </a:solidFill>
+                <a:effectLst/>
+                <a:latin typeface="+mn-lt"/>
+                <a:ea typeface="ＭＳ Ｐゴシック" pitchFamily="-106" charset="-128"/>
+                <a:cs typeface="ＭＳ Ｐゴシック" pitchFamily="-106" charset="-128"/>
+              </a:rPr>
+              <a:t> </a:t>
+            </a:r>
+          </a:p>
+          <a:p>
+            <a:r>
+              <a:rPr lang="en-US" sz="1400" kern="1200" dirty="0">
+                <a:solidFill>
+                  <a:schemeClr val="tx1"/>
+                </a:solidFill>
+                <a:effectLst/>
+                <a:latin typeface="+mn-lt"/>
+                <a:ea typeface="ＭＳ Ｐゴシック" pitchFamily="-106" charset="-128"/>
+                <a:cs typeface="ＭＳ Ｐゴシック" pitchFamily="-106" charset="-128"/>
+              </a:rPr>
+              <a:t>Jesus said to them, “</a:t>
+            </a:r>
+            <a:r>
+              <a:rPr lang="en-US" sz="1400" b="1" kern="1200" dirty="0">
+                <a:solidFill>
+                  <a:schemeClr val="tx1"/>
+                </a:solidFill>
+                <a:effectLst/>
+                <a:latin typeface="+mn-lt"/>
+                <a:ea typeface="ＭＳ Ｐゴシック" pitchFamily="-106" charset="-128"/>
+                <a:cs typeface="ＭＳ Ｐゴシック" pitchFamily="-106" charset="-128"/>
+              </a:rPr>
+              <a:t>I am the bread of life. The one who comes to me will never go hungry, and the one who believes in me will never be thirsty.</a:t>
+            </a:r>
+            <a:r>
+              <a:rPr lang="en-US" sz="1400" kern="1200" dirty="0">
+                <a:solidFill>
+                  <a:schemeClr val="tx1"/>
+                </a:solidFill>
+                <a:effectLst/>
+                <a:latin typeface="+mn-lt"/>
+                <a:ea typeface="ＭＳ Ｐゴシック" pitchFamily="-106" charset="-128"/>
+                <a:cs typeface="ＭＳ Ｐゴシック" pitchFamily="-106" charset="-128"/>
+              </a:rPr>
+              <a:t> But I told you that you have seen me and still do not believe. Everyone whom the Father gives me will come to me, and the one who comes to me I will never send away.</a:t>
+            </a:r>
+          </a:p>
+          <a:p>
+            <a:r>
+              <a:rPr lang="en-US" sz="1400" b="1" kern="1200" dirty="0">
+                <a:solidFill>
+                  <a:schemeClr val="tx1"/>
+                </a:solidFill>
+                <a:effectLst/>
+                <a:latin typeface="+mn-lt"/>
+                <a:ea typeface="ＭＳ Ｐゴシック" pitchFamily="-106" charset="-128"/>
+                <a:cs typeface="ＭＳ Ｐゴシック" pitchFamily="-106" charset="-128"/>
+              </a:rPr>
+              <a:t>(Joh 6:35-37)</a:t>
+            </a:r>
+          </a:p>
+          <a:p>
+            <a:r>
+              <a:rPr lang="en-US" sz="1400" kern="1200" dirty="0">
+                <a:solidFill>
+                  <a:schemeClr val="tx1"/>
+                </a:solidFill>
+                <a:effectLst/>
+                <a:latin typeface="+mn-lt"/>
+                <a:ea typeface="ＭＳ Ｐゴシック" pitchFamily="-106" charset="-128"/>
+                <a:cs typeface="ＭＳ Ｐゴシック" pitchFamily="-106" charset="-128"/>
+              </a:rPr>
+              <a:t> </a:t>
+            </a:r>
+          </a:p>
+          <a:p>
+            <a:r>
+              <a:rPr lang="en-US" sz="1400" kern="1200" dirty="0">
+                <a:solidFill>
+                  <a:schemeClr val="tx1"/>
+                </a:solidFill>
+                <a:effectLst/>
+                <a:latin typeface="+mn-lt"/>
+                <a:ea typeface="ＭＳ Ｐゴシック" pitchFamily="-106" charset="-128"/>
+                <a:cs typeface="ＭＳ Ｐゴシック" pitchFamily="-106" charset="-128"/>
+              </a:rPr>
+              <a:t>My sheep listen to my voice, and I know them, and they follow me. I give them eternal life, and they will never perish; </a:t>
+            </a:r>
+            <a:r>
+              <a:rPr lang="en-US" sz="1400" b="1" kern="1200" dirty="0">
+                <a:solidFill>
+                  <a:schemeClr val="tx1"/>
+                </a:solidFill>
+                <a:effectLst/>
+                <a:latin typeface="+mn-lt"/>
+                <a:ea typeface="ＭＳ Ｐゴシック" pitchFamily="-106" charset="-128"/>
+                <a:cs typeface="ＭＳ Ｐゴシック" pitchFamily="-106" charset="-128"/>
+              </a:rPr>
+              <a:t>no one will snatch them from my hand</a:t>
+            </a:r>
+            <a:r>
+              <a:rPr lang="en-US" sz="1400" kern="1200" dirty="0">
+                <a:solidFill>
+                  <a:schemeClr val="tx1"/>
+                </a:solidFill>
+                <a:effectLst/>
+                <a:latin typeface="+mn-lt"/>
+                <a:ea typeface="ＭＳ Ｐゴシック" pitchFamily="-106" charset="-128"/>
+                <a:cs typeface="ＭＳ Ｐゴシック" pitchFamily="-106" charset="-128"/>
+              </a:rPr>
+              <a:t>. My Father, who has given them to me, is greater than all, and no one can snatch them from my Father’s hand.</a:t>
+            </a:r>
+          </a:p>
+          <a:p>
+            <a:r>
+              <a:rPr lang="en-US" sz="1400" b="1" kern="1200" dirty="0">
+                <a:solidFill>
+                  <a:schemeClr val="tx1"/>
+                </a:solidFill>
+                <a:effectLst/>
+                <a:latin typeface="+mn-lt"/>
+                <a:ea typeface="ＭＳ Ｐゴシック" pitchFamily="-106" charset="-128"/>
+                <a:cs typeface="ＭＳ Ｐゴシック" pitchFamily="-106" charset="-128"/>
+              </a:rPr>
+              <a:t>(Joh 10:27-29)</a:t>
+            </a:r>
+          </a:p>
+          <a:p>
+            <a:r>
+              <a:rPr lang="en-US" sz="1400" kern="1200" dirty="0">
+                <a:solidFill>
+                  <a:schemeClr val="tx1"/>
+                </a:solidFill>
+                <a:effectLst/>
+                <a:latin typeface="+mn-lt"/>
+                <a:ea typeface="ＭＳ Ｐゴシック" pitchFamily="-106" charset="-128"/>
+                <a:cs typeface="ＭＳ Ｐゴシック" pitchFamily="-106" charset="-128"/>
+              </a:rPr>
+              <a:t> </a:t>
+            </a:r>
+          </a:p>
+          <a:p>
+            <a:r>
+              <a:rPr lang="en-US" sz="1400" kern="1200" dirty="0">
+                <a:solidFill>
+                  <a:schemeClr val="tx1"/>
+                </a:solidFill>
+                <a:effectLst/>
+                <a:latin typeface="+mn-lt"/>
+                <a:ea typeface="ＭＳ Ｐゴシック" pitchFamily="-106" charset="-128"/>
+                <a:cs typeface="ＭＳ Ｐゴシック" pitchFamily="-106" charset="-128"/>
+              </a:rPr>
+              <a:t>For it says in scripture, “Look, I lay in Zion a stone, a chosen and precious cornerstone, and whoever believes in him will never be put to shame.” </a:t>
+            </a:r>
+            <a:r>
+              <a:rPr lang="en-US" sz="1400" b="1" kern="1200" dirty="0">
+                <a:solidFill>
+                  <a:schemeClr val="tx1"/>
+                </a:solidFill>
+                <a:effectLst/>
+                <a:latin typeface="+mn-lt"/>
+                <a:ea typeface="ＭＳ Ｐゴシック" pitchFamily="-106" charset="-128"/>
+                <a:cs typeface="ＭＳ Ｐゴシック" pitchFamily="-106" charset="-128"/>
+              </a:rPr>
+              <a:t>So you who believe see his value, but for those who do not believe, the stone that the builders rejected has become the cornerstone , and a stumbling-stone and a rock to trip over</a:t>
+            </a:r>
+            <a:r>
+              <a:rPr lang="en-US" sz="1400" kern="1200" dirty="0">
+                <a:solidFill>
+                  <a:schemeClr val="tx1"/>
+                </a:solidFill>
+                <a:effectLst/>
+                <a:latin typeface="+mn-lt"/>
+                <a:ea typeface="ＭＳ Ｐゴシック" pitchFamily="-106" charset="-128"/>
+                <a:cs typeface="ＭＳ Ｐゴシック" pitchFamily="-106" charset="-128"/>
+              </a:rPr>
+              <a:t>. They stumble because they disobey the word, as they were destined to do. But you are a chosen race, a royal priesthood, a holy nation, a people of his own, so that you may proclaim the virtues of the one who called you out of darkness into his marvelous light. You once were not a people, but now you are God’s people. You were shown no mercy, but now you have received mercy.</a:t>
+            </a:r>
+          </a:p>
+          <a:p>
+            <a:r>
+              <a:rPr lang="en-US" sz="1400" b="1" kern="1200" dirty="0">
+                <a:solidFill>
+                  <a:schemeClr val="tx1"/>
+                </a:solidFill>
+                <a:effectLst/>
+                <a:latin typeface="+mn-lt"/>
+                <a:ea typeface="ＭＳ Ｐゴシック" pitchFamily="-106" charset="-128"/>
+                <a:cs typeface="ＭＳ Ｐゴシック" pitchFamily="-106" charset="-128"/>
+              </a:rPr>
+              <a:t>(1Pe 2:6-10)</a:t>
+            </a:r>
+          </a:p>
+          <a:p>
+            <a:r>
+              <a:rPr lang="en-US" sz="1400" kern="1200" dirty="0">
+                <a:solidFill>
+                  <a:schemeClr val="tx1"/>
+                </a:solidFill>
+                <a:effectLst/>
+                <a:latin typeface="+mn-lt"/>
+                <a:ea typeface="ＭＳ Ｐゴシック" pitchFamily="-106" charset="-128"/>
+                <a:cs typeface="ＭＳ Ｐゴシック" pitchFamily="-106" charset="-128"/>
+              </a:rPr>
+              <a:t> </a:t>
+            </a:r>
+          </a:p>
+          <a:p>
+            <a:r>
+              <a:rPr lang="en-US" sz="1400" kern="1200" dirty="0">
+                <a:solidFill>
+                  <a:schemeClr val="tx1"/>
+                </a:solidFill>
+                <a:effectLst/>
+                <a:latin typeface="+mn-lt"/>
+                <a:ea typeface="ＭＳ Ｐゴシック" pitchFamily="-106" charset="-128"/>
+                <a:cs typeface="ＭＳ Ｐゴシック" pitchFamily="-106" charset="-128"/>
+              </a:rPr>
+              <a:t>****</a:t>
+            </a:r>
+          </a:p>
+          <a:p>
+            <a:r>
+              <a:rPr lang="en-US" sz="1400" kern="1200" dirty="0">
+                <a:solidFill>
+                  <a:schemeClr val="tx1"/>
+                </a:solidFill>
+                <a:effectLst/>
+                <a:latin typeface="+mn-lt"/>
+                <a:ea typeface="ＭＳ Ｐゴシック" pitchFamily="-106" charset="-128"/>
+                <a:cs typeface="ＭＳ Ｐゴシック" pitchFamily="-106" charset="-128"/>
+              </a:rPr>
+              <a:t>So then, my dear friends, just as you have always obeyed, not only in my presence but even more in my absence, </a:t>
+            </a:r>
+            <a:r>
+              <a:rPr lang="en-US" sz="1400" b="1" kern="1200" dirty="0">
+                <a:solidFill>
+                  <a:schemeClr val="tx1"/>
+                </a:solidFill>
+                <a:effectLst/>
+                <a:latin typeface="+mn-lt"/>
+                <a:ea typeface="ＭＳ Ｐゴシック" pitchFamily="-106" charset="-128"/>
+                <a:cs typeface="ＭＳ Ｐゴシック" pitchFamily="-106" charset="-128"/>
+              </a:rPr>
+              <a:t>continue working out your salvation with awe and reverence</a:t>
+            </a:r>
+            <a:r>
+              <a:rPr lang="en-US" sz="1400" kern="1200" dirty="0">
+                <a:solidFill>
+                  <a:schemeClr val="tx1"/>
+                </a:solidFill>
+                <a:effectLst/>
+                <a:latin typeface="+mn-lt"/>
+                <a:ea typeface="ＭＳ Ｐゴシック" pitchFamily="-106" charset="-128"/>
+                <a:cs typeface="ＭＳ Ｐゴシック" pitchFamily="-106" charset="-128"/>
+              </a:rPr>
+              <a:t>, </a:t>
+            </a:r>
+            <a:r>
+              <a:rPr lang="en-US" sz="1400" b="1" kern="1200" dirty="0">
+                <a:solidFill>
+                  <a:schemeClr val="tx1"/>
+                </a:solidFill>
+                <a:effectLst/>
+                <a:latin typeface="+mn-lt"/>
+                <a:ea typeface="ＭＳ Ｐゴシック" pitchFamily="-106" charset="-128"/>
+                <a:cs typeface="ＭＳ Ｐゴシック" pitchFamily="-106" charset="-128"/>
+              </a:rPr>
+              <a:t>for the one bringing forth in you both the desire and the effort – for the sake of his good pleasure – is God.</a:t>
+            </a:r>
+          </a:p>
+          <a:p>
+            <a:r>
+              <a:rPr lang="en-US" sz="1400" kern="1200" dirty="0">
+                <a:solidFill>
+                  <a:schemeClr val="tx1"/>
+                </a:solidFill>
+                <a:effectLst/>
+                <a:latin typeface="+mn-lt"/>
+                <a:ea typeface="ＭＳ Ｐゴシック" pitchFamily="-106" charset="-128"/>
+                <a:cs typeface="ＭＳ Ｐゴシック" pitchFamily="-106" charset="-128"/>
+              </a:rPr>
+              <a:t>(</a:t>
+            </a:r>
+            <a:r>
+              <a:rPr lang="en-US" sz="1400" kern="1200" dirty="0" err="1">
+                <a:solidFill>
+                  <a:schemeClr val="tx1"/>
+                </a:solidFill>
+                <a:effectLst/>
+                <a:latin typeface="+mn-lt"/>
+                <a:ea typeface="ＭＳ Ｐゴシック" pitchFamily="-106" charset="-128"/>
+                <a:cs typeface="ＭＳ Ｐゴシック" pitchFamily="-106" charset="-128"/>
+              </a:rPr>
+              <a:t>Php</a:t>
+            </a:r>
+            <a:r>
+              <a:rPr lang="en-US" sz="1400" kern="1200" dirty="0">
+                <a:solidFill>
+                  <a:schemeClr val="tx1"/>
+                </a:solidFill>
+                <a:effectLst/>
+                <a:latin typeface="+mn-lt"/>
+                <a:ea typeface="ＭＳ Ｐゴシック" pitchFamily="-106" charset="-128"/>
+                <a:cs typeface="ＭＳ Ｐゴシック" pitchFamily="-106" charset="-128"/>
+              </a:rPr>
+              <a:t> 2:12-13) </a:t>
+            </a:r>
+          </a:p>
+          <a:p>
+            <a:r>
+              <a:rPr lang="en-US" sz="1400" kern="1200" dirty="0">
+                <a:solidFill>
+                  <a:schemeClr val="tx1"/>
+                </a:solidFill>
+                <a:effectLst/>
+                <a:latin typeface="+mn-lt"/>
+                <a:ea typeface="ＭＳ Ｐゴシック" pitchFamily="-106" charset="-128"/>
+                <a:cs typeface="ＭＳ Ｐゴシック" pitchFamily="-106" charset="-128"/>
+              </a:rPr>
+              <a:t> </a:t>
+            </a:r>
+          </a:p>
+          <a:p>
+            <a:r>
+              <a:rPr lang="en-US" sz="1400" kern="1200" dirty="0">
+                <a:solidFill>
+                  <a:schemeClr val="tx1"/>
+                </a:solidFill>
+                <a:effectLst/>
+                <a:latin typeface="+mn-lt"/>
+                <a:ea typeface="ＭＳ Ｐゴシック" pitchFamily="-106" charset="-128"/>
+                <a:cs typeface="ＭＳ Ｐゴシック" pitchFamily="-106" charset="-128"/>
+              </a:rPr>
+              <a:t>For I am sure of this very thing, </a:t>
+            </a:r>
+            <a:r>
+              <a:rPr lang="en-US" sz="1400" b="1" kern="1200" dirty="0">
+                <a:solidFill>
+                  <a:schemeClr val="tx1"/>
+                </a:solidFill>
+                <a:effectLst/>
+                <a:latin typeface="+mn-lt"/>
+                <a:ea typeface="ＭＳ Ｐゴシック" pitchFamily="-106" charset="-128"/>
+                <a:cs typeface="ＭＳ Ｐゴシック" pitchFamily="-106" charset="-128"/>
+              </a:rPr>
+              <a:t>that the one who began a good work in you will perfect it until the day of Christ Jesus</a:t>
+            </a:r>
+            <a:r>
+              <a:rPr lang="en-US" sz="1400" kern="1200" dirty="0">
+                <a:solidFill>
+                  <a:schemeClr val="tx1"/>
+                </a:solidFill>
+                <a:effectLst/>
+                <a:latin typeface="+mn-lt"/>
+                <a:ea typeface="ＭＳ Ｐゴシック" pitchFamily="-106" charset="-128"/>
+                <a:cs typeface="ＭＳ Ｐゴシック" pitchFamily="-106" charset="-128"/>
+              </a:rPr>
+              <a:t>.</a:t>
+            </a:r>
+          </a:p>
+          <a:p>
+            <a:r>
+              <a:rPr lang="en-US" sz="1400" kern="1200" dirty="0">
+                <a:solidFill>
+                  <a:schemeClr val="tx1"/>
+                </a:solidFill>
+                <a:effectLst/>
+                <a:latin typeface="+mn-lt"/>
+                <a:ea typeface="ＭＳ Ｐゴシック" pitchFamily="-106" charset="-128"/>
+                <a:cs typeface="ＭＳ Ｐゴシック" pitchFamily="-106" charset="-128"/>
+              </a:rPr>
+              <a:t>(</a:t>
+            </a:r>
+            <a:r>
+              <a:rPr lang="en-US" sz="1400" kern="1200" dirty="0" err="1">
+                <a:solidFill>
+                  <a:schemeClr val="tx1"/>
+                </a:solidFill>
+                <a:effectLst/>
+                <a:latin typeface="+mn-lt"/>
+                <a:ea typeface="ＭＳ Ｐゴシック" pitchFamily="-106" charset="-128"/>
+                <a:cs typeface="ＭＳ Ｐゴシック" pitchFamily="-106" charset="-128"/>
+              </a:rPr>
+              <a:t>Php</a:t>
+            </a:r>
+            <a:r>
+              <a:rPr lang="en-US" sz="1400" kern="1200" dirty="0">
+                <a:solidFill>
+                  <a:schemeClr val="tx1"/>
+                </a:solidFill>
+                <a:effectLst/>
+                <a:latin typeface="+mn-lt"/>
+                <a:ea typeface="ＭＳ Ｐゴシック" pitchFamily="-106" charset="-128"/>
+                <a:cs typeface="ＭＳ Ｐゴシック" pitchFamily="-106" charset="-128"/>
+              </a:rPr>
+              <a:t> 1:6 </a:t>
+            </a:r>
+          </a:p>
+          <a:p>
+            <a:r>
+              <a:rPr lang="en-US" sz="1400" kern="1200" dirty="0">
+                <a:solidFill>
+                  <a:schemeClr val="tx1"/>
+                </a:solidFill>
+                <a:effectLst/>
+                <a:latin typeface="+mn-lt"/>
+                <a:ea typeface="ＭＳ Ｐゴシック" pitchFamily="-106" charset="-128"/>
+                <a:cs typeface="ＭＳ Ｐゴシック" pitchFamily="-106" charset="-128"/>
+              </a:rPr>
+              <a:t> </a:t>
+            </a:r>
+          </a:p>
+          <a:p>
+            <a:r>
+              <a:rPr lang="en-US" sz="1400" b="1" kern="1200" dirty="0">
+                <a:solidFill>
+                  <a:schemeClr val="tx1"/>
+                </a:solidFill>
+                <a:effectLst/>
+                <a:latin typeface="+mn-lt"/>
+                <a:ea typeface="ＭＳ Ｐゴシック" pitchFamily="-106" charset="-128"/>
+                <a:cs typeface="ＭＳ Ｐゴシック" pitchFamily="-106" charset="-128"/>
+              </a:rPr>
+              <a:t>For we are his creative work, having been created in Christ Jesus for good works that God prepared beforehand so we can do them</a:t>
+            </a:r>
+            <a:r>
+              <a:rPr lang="en-US" sz="1400" kern="1200" dirty="0">
+                <a:solidFill>
+                  <a:schemeClr val="tx1"/>
+                </a:solidFill>
+                <a:effectLst/>
+                <a:latin typeface="+mn-lt"/>
+                <a:ea typeface="ＭＳ Ｐゴシック" pitchFamily="-106" charset="-128"/>
+                <a:cs typeface="ＭＳ Ｐゴシック" pitchFamily="-106" charset="-128"/>
+              </a:rPr>
+              <a:t>.</a:t>
+            </a:r>
+          </a:p>
+          <a:p>
+            <a:r>
+              <a:rPr lang="en-US" sz="1400" kern="1200" dirty="0">
+                <a:solidFill>
+                  <a:schemeClr val="tx1"/>
+                </a:solidFill>
+                <a:effectLst/>
+                <a:latin typeface="+mn-lt"/>
+                <a:ea typeface="ＭＳ Ｐゴシック" pitchFamily="-106" charset="-128"/>
+                <a:cs typeface="ＭＳ Ｐゴシック" pitchFamily="-106" charset="-128"/>
+              </a:rPr>
+              <a:t>(Eph 2:10)</a:t>
+            </a:r>
+          </a:p>
+          <a:p>
+            <a:r>
+              <a:rPr lang="en-US" sz="1400" kern="1200" dirty="0">
+                <a:solidFill>
+                  <a:schemeClr val="tx1"/>
+                </a:solidFill>
+                <a:effectLst/>
+                <a:latin typeface="+mn-lt"/>
+                <a:ea typeface="ＭＳ Ｐゴシック" pitchFamily="-106" charset="-128"/>
+                <a:cs typeface="ＭＳ Ｐゴシック" pitchFamily="-106" charset="-128"/>
+              </a:rPr>
+              <a:t>*****</a:t>
+            </a:r>
+          </a:p>
+          <a:p>
+            <a:endParaRPr lang="en-US" dirty="0"/>
+          </a:p>
+        </p:txBody>
+      </p:sp>
+      <p:sp>
+        <p:nvSpPr>
+          <p:cNvPr id="4" name="Slide Number Placeholder 3">
+            <a:extLst>
+              <a:ext uri="{FF2B5EF4-FFF2-40B4-BE49-F238E27FC236}">
+                <a16:creationId xmlns:a16="http://schemas.microsoft.com/office/drawing/2014/main" id="{BBDCE01E-5C3A-F4C5-A974-1C849420CECD}"/>
+              </a:ext>
+            </a:extLst>
+          </p:cNvPr>
+          <p:cNvSpPr>
+            <a:spLocks noGrp="1"/>
+          </p:cNvSpPr>
+          <p:nvPr>
+            <p:ph type="sldNum" sz="quarter" idx="10"/>
+          </p:nvPr>
+        </p:nvSpPr>
+        <p:spPr/>
+        <p:txBody>
+          <a:bodyPr/>
+          <a:lstStyle/>
+          <a:p>
+            <a:pPr>
+              <a:defRPr/>
+            </a:pPr>
+            <a:fld id="{07776858-791E-4C8D-8FA3-473B3AFECFAC}" type="slidenum">
+              <a:rPr lang="en-US" smtClean="0"/>
+              <a:pPr>
+                <a:defRPr/>
+              </a:pPr>
+              <a:t>3</a:t>
+            </a:fld>
+            <a:endParaRPr lang="en-US"/>
+          </a:p>
+        </p:txBody>
+      </p:sp>
+    </p:spTree>
+    <p:extLst>
+      <p:ext uri="{BB962C8B-B14F-4D97-AF65-F5344CB8AC3E}">
+        <p14:creationId xmlns:p14="http://schemas.microsoft.com/office/powerpoint/2010/main" val="1565958254"/>
+      </p:ext>
+    </p:extLst>
+  </p:cSld>
+  <p:clrMapOvr>
+    <a:masterClrMapping/>
+  </p:clrMapOvr>
+</p:notes>
+</file>
+
+<file path=ppt/notesSlides/notesSlide4.xml><?xml version="1.0" encoding="utf-8"?>
+<p:notes xmlns:a="http://schemas.openxmlformats.org/drawingml/2006/main" xmlns:r="http://schemas.openxmlformats.org/officeDocument/2006/relationships" xmlns:p="http://schemas.openxmlformats.org/presentationml/2006/main">
+  <p:cSld>
+    <p:spTree>
+      <p:nvGrpSpPr>
+        <p:cNvPr id="1" name="">
+          <a:extLst>
+            <a:ext uri="{FF2B5EF4-FFF2-40B4-BE49-F238E27FC236}">
               <a16:creationId xmlns:a16="http://schemas.microsoft.com/office/drawing/2014/main" id="{FA555301-24DE-3BD1-3692-7A8319C367E2}"/>
             </a:ext>
           </a:extLst>
@@ -1326,7 +2030,7 @@
               <a:pPr>
                 <a:defRPr/>
               </a:pPr>
-              <a:t>3</a:t>
+              <a:t>4</a:t>
             </a:fld>
             <a:endParaRPr lang="en-US"/>
           </a:p>
@@ -1336,710 +2040,6 @@
     <p:extLst>
       <p:ext uri="{BB962C8B-B14F-4D97-AF65-F5344CB8AC3E}">
         <p14:creationId xmlns:p14="http://schemas.microsoft.com/office/powerpoint/2010/main" val="3127934773"/>
-      </p:ext>
-    </p:extLst>
-  </p:cSld>
-  <p:clrMapOvr>
-    <a:masterClrMapping/>
-  </p:clrMapOvr>
-</p:notes>
-</file>
-
-<file path=ppt/notesSlides/notesSlide4.xml><?xml version="1.0" encoding="utf-8"?>
-<p:notes xmlns:a="http://schemas.openxmlformats.org/drawingml/2006/main" xmlns:r="http://schemas.openxmlformats.org/officeDocument/2006/relationships" xmlns:p="http://schemas.openxmlformats.org/presentationml/2006/main">
-  <p:cSld>
-    <p:spTree>
-      <p:nvGrpSpPr>
-        <p:cNvPr id="1" name="">
-          <a:extLst>
-            <a:ext uri="{FF2B5EF4-FFF2-40B4-BE49-F238E27FC236}">
-              <a16:creationId xmlns:a16="http://schemas.microsoft.com/office/drawing/2014/main" id="{DC93114B-654F-892D-4761-4F9E4A88ACB3}"/>
-            </a:ext>
-          </a:extLst>
-        </p:cNvPr>
-        <p:cNvGrpSpPr/>
-        <p:nvPr/>
-      </p:nvGrpSpPr>
-      <p:grpSpPr>
-        <a:xfrm>
-          <a:off x="0" y="0"/>
-          <a:ext cx="0" cy="0"/>
-          <a:chOff x="0" y="0"/>
-          <a:chExt cx="0" cy="0"/>
-        </a:xfrm>
-      </p:grpSpPr>
-      <p:sp>
-        <p:nvSpPr>
-          <p:cNvPr id="2" name="Slide Image Placeholder 1">
-            <a:extLst>
-              <a:ext uri="{FF2B5EF4-FFF2-40B4-BE49-F238E27FC236}">
-                <a16:creationId xmlns:a16="http://schemas.microsoft.com/office/drawing/2014/main" id="{493F4753-5F2C-080A-DC80-172615607A5A}"/>
-              </a:ext>
-            </a:extLst>
-          </p:cNvPr>
-          <p:cNvSpPr>
-            <a:spLocks noGrp="1" noRot="1" noChangeAspect="1"/>
-          </p:cNvSpPr>
-          <p:nvPr>
-            <p:ph type="sldImg"/>
-          </p:nvPr>
-        </p:nvSpPr>
-        <p:spPr/>
-      </p:sp>
-      <p:sp>
-        <p:nvSpPr>
-          <p:cNvPr id="3" name="Notes Placeholder 2">
-            <a:extLst>
-              <a:ext uri="{FF2B5EF4-FFF2-40B4-BE49-F238E27FC236}">
-                <a16:creationId xmlns:a16="http://schemas.microsoft.com/office/drawing/2014/main" id="{F44C299B-9D30-22A1-BE08-AF9B57B86F96}"/>
-              </a:ext>
-            </a:extLst>
-          </p:cNvPr>
-          <p:cNvSpPr>
-            <a:spLocks noGrp="1"/>
-          </p:cNvSpPr>
-          <p:nvPr>
-            <p:ph type="body" idx="1"/>
-          </p:nvPr>
-        </p:nvSpPr>
-        <p:spPr/>
-        <p:txBody>
-          <a:bodyPr>
-            <a:normAutofit fontScale="47500" lnSpcReduction="20000"/>
-          </a:bodyPr>
-          <a:lstStyle/>
-          <a:p>
-            <a:pPr marL="0" marR="0" lvl="0" indent="0" algn="l" defTabSz="914400" rtl="0" eaLnBrk="0" fontAlgn="base" latinLnBrk="0" hangingPunct="0">
-              <a:lnSpc>
-                <a:spcPct val="100000"/>
-              </a:lnSpc>
-              <a:spcBef>
-                <a:spcPct val="30000"/>
-              </a:spcBef>
-              <a:spcAft>
-                <a:spcPct val="0"/>
-              </a:spcAft>
-              <a:buClrTx/>
-              <a:buSzTx/>
-              <a:buFontTx/>
-              <a:buNone/>
-              <a:tabLst/>
-              <a:defRPr/>
-            </a:pPr>
-            <a:r>
-              <a:rPr lang="en-US" sz="1400" b="1" kern="1200" dirty="0">
-                <a:solidFill>
-                  <a:schemeClr val="tx1"/>
-                </a:solidFill>
-                <a:effectLst/>
-                <a:latin typeface="+mn-lt"/>
-                <a:ea typeface="ＭＳ Ｐゴシック" pitchFamily="-106" charset="-128"/>
-                <a:cs typeface="ＭＳ Ｐゴシック" pitchFamily="-106" charset="-128"/>
-              </a:rPr>
-              <a:t>The Will of Man and the Sovereignty of God - working together</a:t>
-            </a:r>
-          </a:p>
-          <a:p>
-            <a:endParaRPr lang="en-US" sz="1400" b="1" kern="1200" dirty="0">
-              <a:solidFill>
-                <a:schemeClr val="tx1"/>
-              </a:solidFill>
-              <a:effectLst/>
-              <a:latin typeface="+mn-lt"/>
-              <a:ea typeface="ＭＳ Ｐゴシック" pitchFamily="-106" charset="-128"/>
-              <a:cs typeface="ＭＳ Ｐゴシック" pitchFamily="-106" charset="-128"/>
-            </a:endParaRPr>
-          </a:p>
-          <a:p>
-            <a:r>
-              <a:rPr lang="en-US" sz="1400" b="1" kern="1200" dirty="0">
-                <a:solidFill>
-                  <a:schemeClr val="tx1"/>
-                </a:solidFill>
-                <a:effectLst/>
-                <a:latin typeface="+mn-lt"/>
-                <a:ea typeface="ＭＳ Ｐゴシック" pitchFamily="-106" charset="-128"/>
-                <a:cs typeface="ＭＳ Ｐゴシック" pitchFamily="-106" charset="-128"/>
-              </a:rPr>
-              <a:t>Double </a:t>
-            </a:r>
-            <a:r>
-              <a:rPr lang="en-US" sz="1400" b="1" kern="1200" dirty="0" err="1">
-                <a:solidFill>
-                  <a:schemeClr val="tx1"/>
-                </a:solidFill>
-                <a:effectLst/>
-                <a:latin typeface="+mn-lt"/>
-                <a:ea typeface="ＭＳ Ｐゴシック" pitchFamily="-106" charset="-128"/>
-                <a:cs typeface="ＭＳ Ｐゴシック" pitchFamily="-106" charset="-128"/>
-              </a:rPr>
-              <a:t>PreDestination</a:t>
-            </a:r>
-            <a:r>
-              <a:rPr lang="en-US" sz="1400" b="1" kern="1200" dirty="0">
-                <a:solidFill>
-                  <a:schemeClr val="tx1"/>
-                </a:solidFill>
-                <a:effectLst/>
-                <a:latin typeface="+mn-lt"/>
-                <a:ea typeface="ＭＳ Ｐゴシック" pitchFamily="-106" charset="-128"/>
-                <a:cs typeface="ＭＳ Ｐゴシック" pitchFamily="-106" charset="-128"/>
-              </a:rPr>
-              <a:t>:</a:t>
-            </a:r>
-          </a:p>
-          <a:p>
-            <a:pPr marL="171450" indent="-171450" rtl="0" fontAlgn="ctr">
-              <a:buFont typeface="Arial" panose="020B0604020202020204" pitchFamily="34" charset="0"/>
-              <a:buChar char="•"/>
-            </a:pPr>
-            <a:r>
-              <a:rPr lang="en-US" sz="1400" b="0" i="0" kern="1200" dirty="0">
-                <a:solidFill>
-                  <a:schemeClr val="tx1"/>
-                </a:solidFill>
-                <a:effectLst/>
-                <a:latin typeface="+mn-lt"/>
-                <a:ea typeface="ＭＳ Ｐゴシック" pitchFamily="-106" charset="-128"/>
-                <a:cs typeface="ＭＳ Ｐゴシック" pitchFamily="-106" charset="-128"/>
-              </a:rPr>
-              <a:t>Belief equals predestination to salvation.</a:t>
-            </a:r>
-          </a:p>
-          <a:p>
-            <a:pPr marL="171450" indent="-171450" rtl="0" fontAlgn="ctr">
-              <a:buFont typeface="Arial" panose="020B0604020202020204" pitchFamily="34" charset="0"/>
-              <a:buChar char="•"/>
-            </a:pPr>
-            <a:r>
-              <a:rPr lang="en-US" sz="1400" b="0" i="0" kern="1200" dirty="0">
-                <a:solidFill>
-                  <a:schemeClr val="tx1"/>
-                </a:solidFill>
-                <a:effectLst/>
-                <a:latin typeface="+mn-lt"/>
-                <a:ea typeface="ＭＳ Ｐゴシック" pitchFamily="-106" charset="-128"/>
-                <a:cs typeface="ＭＳ Ｐゴシック" pitchFamily="-106" charset="-128"/>
-              </a:rPr>
-              <a:t>Disbelief equals predestination to stumble further.</a:t>
-            </a:r>
-          </a:p>
-          <a:p>
-            <a:r>
-              <a:rPr lang="en-US" sz="1400" kern="1200" dirty="0">
-                <a:solidFill>
-                  <a:schemeClr val="tx1"/>
-                </a:solidFill>
-                <a:effectLst/>
-                <a:latin typeface="+mn-lt"/>
-                <a:ea typeface="ＭＳ Ｐゴシック" pitchFamily="-106" charset="-128"/>
-                <a:cs typeface="ＭＳ Ｐゴシック" pitchFamily="-106" charset="-128"/>
-              </a:rPr>
-              <a:t> </a:t>
-            </a:r>
-          </a:p>
-          <a:p>
-            <a:r>
-              <a:rPr lang="en-US" sz="1400" kern="1200" dirty="0">
-                <a:solidFill>
-                  <a:schemeClr val="tx1"/>
-                </a:solidFill>
-                <a:effectLst/>
-                <a:latin typeface="+mn-lt"/>
-                <a:ea typeface="ＭＳ Ｐゴシック" pitchFamily="-106" charset="-128"/>
-                <a:cs typeface="ＭＳ Ｐゴシック" pitchFamily="-106" charset="-128"/>
-              </a:rPr>
-              <a:t>Jesus said to them, “</a:t>
-            </a:r>
-            <a:r>
-              <a:rPr lang="en-US" sz="1400" b="1" kern="1200" dirty="0">
-                <a:solidFill>
-                  <a:schemeClr val="tx1"/>
-                </a:solidFill>
-                <a:effectLst/>
-                <a:latin typeface="+mn-lt"/>
-                <a:ea typeface="ＭＳ Ｐゴシック" pitchFamily="-106" charset="-128"/>
-                <a:cs typeface="ＭＳ Ｐゴシック" pitchFamily="-106" charset="-128"/>
-              </a:rPr>
-              <a:t>I am the bread of life. The one who comes to me will never go hungry, and the one who believes in me will never be thirsty.</a:t>
-            </a:r>
-            <a:r>
-              <a:rPr lang="en-US" sz="1400" kern="1200" dirty="0">
-                <a:solidFill>
-                  <a:schemeClr val="tx1"/>
-                </a:solidFill>
-                <a:effectLst/>
-                <a:latin typeface="+mn-lt"/>
-                <a:ea typeface="ＭＳ Ｐゴシック" pitchFamily="-106" charset="-128"/>
-                <a:cs typeface="ＭＳ Ｐゴシック" pitchFamily="-106" charset="-128"/>
-              </a:rPr>
-              <a:t> But I told you that you have seen me and still do not believe. Everyone whom the Father gives me will come to me, and the one who comes to me I will never send away.</a:t>
-            </a:r>
-          </a:p>
-          <a:p>
-            <a:r>
-              <a:rPr lang="en-US" sz="1400" b="1" kern="1200" dirty="0">
-                <a:solidFill>
-                  <a:schemeClr val="tx1"/>
-                </a:solidFill>
-                <a:effectLst/>
-                <a:latin typeface="+mn-lt"/>
-                <a:ea typeface="ＭＳ Ｐゴシック" pitchFamily="-106" charset="-128"/>
-                <a:cs typeface="ＭＳ Ｐゴシック" pitchFamily="-106" charset="-128"/>
-              </a:rPr>
-              <a:t>(Joh 6:35-37)</a:t>
-            </a:r>
-          </a:p>
-          <a:p>
-            <a:r>
-              <a:rPr lang="en-US" sz="1400" kern="1200" dirty="0">
-                <a:solidFill>
-                  <a:schemeClr val="tx1"/>
-                </a:solidFill>
-                <a:effectLst/>
-                <a:latin typeface="+mn-lt"/>
-                <a:ea typeface="ＭＳ Ｐゴシック" pitchFamily="-106" charset="-128"/>
-                <a:cs typeface="ＭＳ Ｐゴシック" pitchFamily="-106" charset="-128"/>
-              </a:rPr>
-              <a:t> </a:t>
-            </a:r>
-          </a:p>
-          <a:p>
-            <a:r>
-              <a:rPr lang="en-US" sz="1400" kern="1200" dirty="0">
-                <a:solidFill>
-                  <a:schemeClr val="tx1"/>
-                </a:solidFill>
-                <a:effectLst/>
-                <a:latin typeface="+mn-lt"/>
-                <a:ea typeface="ＭＳ Ｐゴシック" pitchFamily="-106" charset="-128"/>
-                <a:cs typeface="ＭＳ Ｐゴシック" pitchFamily="-106" charset="-128"/>
-              </a:rPr>
-              <a:t>My sheep listen to my voice, and I know them, and they follow me. I give them eternal life, and they will never perish; </a:t>
-            </a:r>
-            <a:r>
-              <a:rPr lang="en-US" sz="1400" b="1" kern="1200" dirty="0">
-                <a:solidFill>
-                  <a:schemeClr val="tx1"/>
-                </a:solidFill>
-                <a:effectLst/>
-                <a:latin typeface="+mn-lt"/>
-                <a:ea typeface="ＭＳ Ｐゴシック" pitchFamily="-106" charset="-128"/>
-                <a:cs typeface="ＭＳ Ｐゴシック" pitchFamily="-106" charset="-128"/>
-              </a:rPr>
-              <a:t>no one will snatch them from my hand</a:t>
-            </a:r>
-            <a:r>
-              <a:rPr lang="en-US" sz="1400" kern="1200" dirty="0">
-                <a:solidFill>
-                  <a:schemeClr val="tx1"/>
-                </a:solidFill>
-                <a:effectLst/>
-                <a:latin typeface="+mn-lt"/>
-                <a:ea typeface="ＭＳ Ｐゴシック" pitchFamily="-106" charset="-128"/>
-                <a:cs typeface="ＭＳ Ｐゴシック" pitchFamily="-106" charset="-128"/>
-              </a:rPr>
-              <a:t>. My Father, who has given them to me, is greater than all, and no one can snatch them from my Father’s hand.</a:t>
-            </a:r>
-          </a:p>
-          <a:p>
-            <a:r>
-              <a:rPr lang="en-US" sz="1400" b="1" kern="1200" dirty="0">
-                <a:solidFill>
-                  <a:schemeClr val="tx1"/>
-                </a:solidFill>
-                <a:effectLst/>
-                <a:latin typeface="+mn-lt"/>
-                <a:ea typeface="ＭＳ Ｐゴシック" pitchFamily="-106" charset="-128"/>
-                <a:cs typeface="ＭＳ Ｐゴシック" pitchFamily="-106" charset="-128"/>
-              </a:rPr>
-              <a:t>(Joh 10:27-29)</a:t>
-            </a:r>
-          </a:p>
-          <a:p>
-            <a:r>
-              <a:rPr lang="en-US" sz="1400" kern="1200" dirty="0">
-                <a:solidFill>
-                  <a:schemeClr val="tx1"/>
-                </a:solidFill>
-                <a:effectLst/>
-                <a:latin typeface="+mn-lt"/>
-                <a:ea typeface="ＭＳ Ｐゴシック" pitchFamily="-106" charset="-128"/>
-                <a:cs typeface="ＭＳ Ｐゴシック" pitchFamily="-106" charset="-128"/>
-              </a:rPr>
-              <a:t> </a:t>
-            </a:r>
-          </a:p>
-          <a:p>
-            <a:r>
-              <a:rPr lang="en-US" sz="1400" kern="1200" dirty="0">
-                <a:solidFill>
-                  <a:schemeClr val="tx1"/>
-                </a:solidFill>
-                <a:effectLst/>
-                <a:latin typeface="+mn-lt"/>
-                <a:ea typeface="ＭＳ Ｐゴシック" pitchFamily="-106" charset="-128"/>
-                <a:cs typeface="ＭＳ Ｐゴシック" pitchFamily="-106" charset="-128"/>
-              </a:rPr>
-              <a:t>For it says in scripture, “Look, I lay in Zion a stone, a chosen and precious cornerstone, and whoever believes in him will never be put to shame.” </a:t>
-            </a:r>
-            <a:r>
-              <a:rPr lang="en-US" sz="1400" b="1" kern="1200" dirty="0">
-                <a:solidFill>
-                  <a:schemeClr val="tx1"/>
-                </a:solidFill>
-                <a:effectLst/>
-                <a:latin typeface="+mn-lt"/>
-                <a:ea typeface="ＭＳ Ｐゴシック" pitchFamily="-106" charset="-128"/>
-                <a:cs typeface="ＭＳ Ｐゴシック" pitchFamily="-106" charset="-128"/>
-              </a:rPr>
-              <a:t>So you who believe see his value, but for those who do not believe, the stone that the builders rejected has become the cornerstone , and a stumbling-stone and a rock to trip over</a:t>
-            </a:r>
-            <a:r>
-              <a:rPr lang="en-US" sz="1400" kern="1200" dirty="0">
-                <a:solidFill>
-                  <a:schemeClr val="tx1"/>
-                </a:solidFill>
-                <a:effectLst/>
-                <a:latin typeface="+mn-lt"/>
-                <a:ea typeface="ＭＳ Ｐゴシック" pitchFamily="-106" charset="-128"/>
-                <a:cs typeface="ＭＳ Ｐゴシック" pitchFamily="-106" charset="-128"/>
-              </a:rPr>
-              <a:t>. They stumble because they disobey the word, as they were destined to do. But you are a chosen race, a royal priesthood, a holy nation, a people of his own, so that you may proclaim the virtues of the one who called you out of darkness into his marvelous light. You once were not a people, but now you are God’s people. You were shown no mercy, but now you have received mercy.</a:t>
-            </a:r>
-          </a:p>
-          <a:p>
-            <a:r>
-              <a:rPr lang="en-US" sz="1400" b="1" kern="1200" dirty="0">
-                <a:solidFill>
-                  <a:schemeClr val="tx1"/>
-                </a:solidFill>
-                <a:effectLst/>
-                <a:latin typeface="+mn-lt"/>
-                <a:ea typeface="ＭＳ Ｐゴシック" pitchFamily="-106" charset="-128"/>
-                <a:cs typeface="ＭＳ Ｐゴシック" pitchFamily="-106" charset="-128"/>
-              </a:rPr>
-              <a:t>(1Pe 2:6-10)</a:t>
-            </a:r>
-          </a:p>
-          <a:p>
-            <a:r>
-              <a:rPr lang="en-US" sz="1400" kern="1200" dirty="0">
-                <a:solidFill>
-                  <a:schemeClr val="tx1"/>
-                </a:solidFill>
-                <a:effectLst/>
-                <a:latin typeface="+mn-lt"/>
-                <a:ea typeface="ＭＳ Ｐゴシック" pitchFamily="-106" charset="-128"/>
-                <a:cs typeface="ＭＳ Ｐゴシック" pitchFamily="-106" charset="-128"/>
-              </a:rPr>
-              <a:t> </a:t>
-            </a:r>
-          </a:p>
-          <a:p>
-            <a:r>
-              <a:rPr lang="en-US" sz="1400" kern="1200" dirty="0">
-                <a:solidFill>
-                  <a:schemeClr val="tx1"/>
-                </a:solidFill>
-                <a:effectLst/>
-                <a:latin typeface="+mn-lt"/>
-                <a:ea typeface="ＭＳ Ｐゴシック" pitchFamily="-106" charset="-128"/>
-                <a:cs typeface="ＭＳ Ｐゴシック" pitchFamily="-106" charset="-128"/>
-              </a:rPr>
-              <a:t>****</a:t>
-            </a:r>
-          </a:p>
-          <a:p>
-            <a:r>
-              <a:rPr lang="en-US" sz="1400" kern="1200" dirty="0">
-                <a:solidFill>
-                  <a:schemeClr val="tx1"/>
-                </a:solidFill>
-                <a:effectLst/>
-                <a:latin typeface="+mn-lt"/>
-                <a:ea typeface="ＭＳ Ｐゴシック" pitchFamily="-106" charset="-128"/>
-                <a:cs typeface="ＭＳ Ｐゴシック" pitchFamily="-106" charset="-128"/>
-              </a:rPr>
-              <a:t>So then, my dear friends, just as you have always obeyed, not only in my presence but even more in my absence, </a:t>
-            </a:r>
-            <a:r>
-              <a:rPr lang="en-US" sz="1400" b="1" kern="1200" dirty="0">
-                <a:solidFill>
-                  <a:schemeClr val="tx1"/>
-                </a:solidFill>
-                <a:effectLst/>
-                <a:latin typeface="+mn-lt"/>
-                <a:ea typeface="ＭＳ Ｐゴシック" pitchFamily="-106" charset="-128"/>
-                <a:cs typeface="ＭＳ Ｐゴシック" pitchFamily="-106" charset="-128"/>
-              </a:rPr>
-              <a:t>continue working out your salvation with awe and reverence</a:t>
-            </a:r>
-            <a:r>
-              <a:rPr lang="en-US" sz="1400" kern="1200" dirty="0">
-                <a:solidFill>
-                  <a:schemeClr val="tx1"/>
-                </a:solidFill>
-                <a:effectLst/>
-                <a:latin typeface="+mn-lt"/>
-                <a:ea typeface="ＭＳ Ｐゴシック" pitchFamily="-106" charset="-128"/>
-                <a:cs typeface="ＭＳ Ｐゴシック" pitchFamily="-106" charset="-128"/>
-              </a:rPr>
-              <a:t>, </a:t>
-            </a:r>
-            <a:r>
-              <a:rPr lang="en-US" sz="1400" b="1" kern="1200" dirty="0">
-                <a:solidFill>
-                  <a:schemeClr val="tx1"/>
-                </a:solidFill>
-                <a:effectLst/>
-                <a:latin typeface="+mn-lt"/>
-                <a:ea typeface="ＭＳ Ｐゴシック" pitchFamily="-106" charset="-128"/>
-                <a:cs typeface="ＭＳ Ｐゴシック" pitchFamily="-106" charset="-128"/>
-              </a:rPr>
-              <a:t>for the one bringing forth in you both the desire and the effort – for the sake of his good pleasure – is God.</a:t>
-            </a:r>
-          </a:p>
-          <a:p>
-            <a:r>
-              <a:rPr lang="en-US" sz="1400" kern="1200" dirty="0">
-                <a:solidFill>
-                  <a:schemeClr val="tx1"/>
-                </a:solidFill>
-                <a:effectLst/>
-                <a:latin typeface="+mn-lt"/>
-                <a:ea typeface="ＭＳ Ｐゴシック" pitchFamily="-106" charset="-128"/>
-                <a:cs typeface="ＭＳ Ｐゴシック" pitchFamily="-106" charset="-128"/>
-              </a:rPr>
-              <a:t>(</a:t>
-            </a:r>
-            <a:r>
-              <a:rPr lang="en-US" sz="1400" kern="1200" dirty="0" err="1">
-                <a:solidFill>
-                  <a:schemeClr val="tx1"/>
-                </a:solidFill>
-                <a:effectLst/>
-                <a:latin typeface="+mn-lt"/>
-                <a:ea typeface="ＭＳ Ｐゴシック" pitchFamily="-106" charset="-128"/>
-                <a:cs typeface="ＭＳ Ｐゴシック" pitchFamily="-106" charset="-128"/>
-              </a:rPr>
-              <a:t>Php</a:t>
-            </a:r>
-            <a:r>
-              <a:rPr lang="en-US" sz="1400" kern="1200" dirty="0">
-                <a:solidFill>
-                  <a:schemeClr val="tx1"/>
-                </a:solidFill>
-                <a:effectLst/>
-                <a:latin typeface="+mn-lt"/>
-                <a:ea typeface="ＭＳ Ｐゴシック" pitchFamily="-106" charset="-128"/>
-                <a:cs typeface="ＭＳ Ｐゴシック" pitchFamily="-106" charset="-128"/>
-              </a:rPr>
-              <a:t> 2:12-13) </a:t>
-            </a:r>
-          </a:p>
-          <a:p>
-            <a:r>
-              <a:rPr lang="en-US" sz="1400" kern="1200" dirty="0">
-                <a:solidFill>
-                  <a:schemeClr val="tx1"/>
-                </a:solidFill>
-                <a:effectLst/>
-                <a:latin typeface="+mn-lt"/>
-                <a:ea typeface="ＭＳ Ｐゴシック" pitchFamily="-106" charset="-128"/>
-                <a:cs typeface="ＭＳ Ｐゴシック" pitchFamily="-106" charset="-128"/>
-              </a:rPr>
-              <a:t> </a:t>
-            </a:r>
-          </a:p>
-          <a:p>
-            <a:r>
-              <a:rPr lang="en-US" sz="1400" kern="1200" dirty="0">
-                <a:solidFill>
-                  <a:schemeClr val="tx1"/>
-                </a:solidFill>
-                <a:effectLst/>
-                <a:latin typeface="+mn-lt"/>
-                <a:ea typeface="ＭＳ Ｐゴシック" pitchFamily="-106" charset="-128"/>
-                <a:cs typeface="ＭＳ Ｐゴシック" pitchFamily="-106" charset="-128"/>
-              </a:rPr>
-              <a:t>For I am sure of this very thing, </a:t>
-            </a:r>
-            <a:r>
-              <a:rPr lang="en-US" sz="1400" b="1" kern="1200" dirty="0">
-                <a:solidFill>
-                  <a:schemeClr val="tx1"/>
-                </a:solidFill>
-                <a:effectLst/>
-                <a:latin typeface="+mn-lt"/>
-                <a:ea typeface="ＭＳ Ｐゴシック" pitchFamily="-106" charset="-128"/>
-                <a:cs typeface="ＭＳ Ｐゴシック" pitchFamily="-106" charset="-128"/>
-              </a:rPr>
-              <a:t>that the one who began a good work in you will perfect it until the day of Christ Jesus</a:t>
-            </a:r>
-            <a:r>
-              <a:rPr lang="en-US" sz="1400" kern="1200" dirty="0">
-                <a:solidFill>
-                  <a:schemeClr val="tx1"/>
-                </a:solidFill>
-                <a:effectLst/>
-                <a:latin typeface="+mn-lt"/>
-                <a:ea typeface="ＭＳ Ｐゴシック" pitchFamily="-106" charset="-128"/>
-                <a:cs typeface="ＭＳ Ｐゴシック" pitchFamily="-106" charset="-128"/>
-              </a:rPr>
-              <a:t>.</a:t>
-            </a:r>
-          </a:p>
-          <a:p>
-            <a:r>
-              <a:rPr lang="en-US" sz="1400" kern="1200" dirty="0">
-                <a:solidFill>
-                  <a:schemeClr val="tx1"/>
-                </a:solidFill>
-                <a:effectLst/>
-                <a:latin typeface="+mn-lt"/>
-                <a:ea typeface="ＭＳ Ｐゴシック" pitchFamily="-106" charset="-128"/>
-                <a:cs typeface="ＭＳ Ｐゴシック" pitchFamily="-106" charset="-128"/>
-              </a:rPr>
-              <a:t>(</a:t>
-            </a:r>
-            <a:r>
-              <a:rPr lang="en-US" sz="1400" kern="1200" dirty="0" err="1">
-                <a:solidFill>
-                  <a:schemeClr val="tx1"/>
-                </a:solidFill>
-                <a:effectLst/>
-                <a:latin typeface="+mn-lt"/>
-                <a:ea typeface="ＭＳ Ｐゴシック" pitchFamily="-106" charset="-128"/>
-                <a:cs typeface="ＭＳ Ｐゴシック" pitchFamily="-106" charset="-128"/>
-              </a:rPr>
-              <a:t>Php</a:t>
-            </a:r>
-            <a:r>
-              <a:rPr lang="en-US" sz="1400" kern="1200" dirty="0">
-                <a:solidFill>
-                  <a:schemeClr val="tx1"/>
-                </a:solidFill>
-                <a:effectLst/>
-                <a:latin typeface="+mn-lt"/>
-                <a:ea typeface="ＭＳ Ｐゴシック" pitchFamily="-106" charset="-128"/>
-                <a:cs typeface="ＭＳ Ｐゴシック" pitchFamily="-106" charset="-128"/>
-              </a:rPr>
-              <a:t> 1:6 </a:t>
-            </a:r>
-          </a:p>
-          <a:p>
-            <a:r>
-              <a:rPr lang="en-US" sz="1400" kern="1200" dirty="0">
-                <a:solidFill>
-                  <a:schemeClr val="tx1"/>
-                </a:solidFill>
-                <a:effectLst/>
-                <a:latin typeface="+mn-lt"/>
-                <a:ea typeface="ＭＳ Ｐゴシック" pitchFamily="-106" charset="-128"/>
-                <a:cs typeface="ＭＳ Ｐゴシック" pitchFamily="-106" charset="-128"/>
-              </a:rPr>
-              <a:t> </a:t>
-            </a:r>
-          </a:p>
-          <a:p>
-            <a:r>
-              <a:rPr lang="en-US" sz="1400" b="1" kern="1200" dirty="0">
-                <a:solidFill>
-                  <a:schemeClr val="tx1"/>
-                </a:solidFill>
-                <a:effectLst/>
-                <a:latin typeface="+mn-lt"/>
-                <a:ea typeface="ＭＳ Ｐゴシック" pitchFamily="-106" charset="-128"/>
-                <a:cs typeface="ＭＳ Ｐゴシック" pitchFamily="-106" charset="-128"/>
-              </a:rPr>
-              <a:t>For we are his creative work, having been created in Christ Jesus for good works that God prepared beforehand so we can do them</a:t>
-            </a:r>
-            <a:r>
-              <a:rPr lang="en-US" sz="1400" kern="1200" dirty="0">
-                <a:solidFill>
-                  <a:schemeClr val="tx1"/>
-                </a:solidFill>
-                <a:effectLst/>
-                <a:latin typeface="+mn-lt"/>
-                <a:ea typeface="ＭＳ Ｐゴシック" pitchFamily="-106" charset="-128"/>
-                <a:cs typeface="ＭＳ Ｐゴシック" pitchFamily="-106" charset="-128"/>
-              </a:rPr>
-              <a:t>.</a:t>
-            </a:r>
-          </a:p>
-          <a:p>
-            <a:r>
-              <a:rPr lang="en-US" sz="1400" kern="1200" dirty="0">
-                <a:solidFill>
-                  <a:schemeClr val="tx1"/>
-                </a:solidFill>
-                <a:effectLst/>
-                <a:latin typeface="+mn-lt"/>
-                <a:ea typeface="ＭＳ Ｐゴシック" pitchFamily="-106" charset="-128"/>
-                <a:cs typeface="ＭＳ Ｐゴシック" pitchFamily="-106" charset="-128"/>
-              </a:rPr>
-              <a:t>(Eph 2:10)</a:t>
-            </a:r>
-          </a:p>
-          <a:p>
-            <a:r>
-              <a:rPr lang="en-US" sz="1400" kern="1200" dirty="0">
-                <a:solidFill>
-                  <a:schemeClr val="tx1"/>
-                </a:solidFill>
-                <a:effectLst/>
-                <a:latin typeface="+mn-lt"/>
-                <a:ea typeface="ＭＳ Ｐゴシック" pitchFamily="-106" charset="-128"/>
-                <a:cs typeface="ＭＳ Ｐゴシック" pitchFamily="-106" charset="-128"/>
-              </a:rPr>
-              <a:t>*****</a:t>
-            </a:r>
-          </a:p>
-          <a:p>
-            <a:endParaRPr lang="en-US" dirty="0"/>
-          </a:p>
-        </p:txBody>
-      </p:sp>
-      <p:sp>
-        <p:nvSpPr>
-          <p:cNvPr id="4" name="Slide Number Placeholder 3">
-            <a:extLst>
-              <a:ext uri="{FF2B5EF4-FFF2-40B4-BE49-F238E27FC236}">
-                <a16:creationId xmlns:a16="http://schemas.microsoft.com/office/drawing/2014/main" id="{BBDCE01E-5C3A-F4C5-A974-1C849420CECD}"/>
-              </a:ext>
-            </a:extLst>
-          </p:cNvPr>
-          <p:cNvSpPr>
-            <a:spLocks noGrp="1"/>
-          </p:cNvSpPr>
-          <p:nvPr>
-            <p:ph type="sldNum" sz="quarter" idx="10"/>
-          </p:nvPr>
-        </p:nvSpPr>
-        <p:spPr/>
-        <p:txBody>
-          <a:bodyPr/>
-          <a:lstStyle/>
-          <a:p>
-            <a:pPr>
-              <a:defRPr/>
-            </a:pPr>
-            <a:fld id="{07776858-791E-4C8D-8FA3-473B3AFECFAC}" type="slidenum">
-              <a:rPr lang="en-US" smtClean="0"/>
-              <a:pPr>
-                <a:defRPr/>
-              </a:pPr>
-              <a:t>4</a:t>
-            </a:fld>
-            <a:endParaRPr lang="en-US"/>
-          </a:p>
-        </p:txBody>
-      </p:sp>
-    </p:spTree>
-    <p:extLst>
-      <p:ext uri="{BB962C8B-B14F-4D97-AF65-F5344CB8AC3E}">
-        <p14:creationId xmlns:p14="http://schemas.microsoft.com/office/powerpoint/2010/main" val="1565958254"/>
       </p:ext>
     </p:extLst>
   </p:cSld>
@@ -5224,7 +5224,15 @@
             </a:r>
             <a:r>
               <a:rPr lang="en-US" sz="1400" baseline="0" dirty="0"/>
-              <a:t>, not based upon the lexical content of these passages (see Romans 5:12-21).</a:t>
+              <a:t>, not based upon the lexical content of </a:t>
+            </a:r>
+            <a:r>
+              <a:rPr lang="en-US" sz="1400" baseline="0"/>
+              <a:t>these passages in Ch11 and Ch5 </a:t>
+            </a:r>
+            <a:r>
+              <a:rPr lang="en-US" sz="1400" baseline="0" dirty="0"/>
+              <a:t>(see Romans 5:12-21).</a:t>
             </a:r>
             <a:endParaRPr lang="en-US" sz="1400" dirty="0"/>
           </a:p>
@@ -8536,6 +8544,464 @@
         <p:cNvPr id="1" name="">
           <a:extLst>
             <a:ext uri="{FF2B5EF4-FFF2-40B4-BE49-F238E27FC236}">
+              <a16:creationId xmlns:a16="http://schemas.microsoft.com/office/drawing/2014/main" id="{D66A4223-15CE-6B2B-EE49-167736EBB4C3}"/>
+            </a:ext>
+          </a:extLst>
+        </p:cNvPr>
+        <p:cNvGrpSpPr/>
+        <p:nvPr/>
+      </p:nvGrpSpPr>
+      <p:grpSpPr>
+        <a:xfrm>
+          <a:off x="0" y="0"/>
+          <a:ext cx="0" cy="0"/>
+          <a:chOff x="0" y="0"/>
+          <a:chExt cx="0" cy="0"/>
+        </a:xfrm>
+      </p:grpSpPr>
+      <p:sp>
+        <p:nvSpPr>
+          <p:cNvPr id="2" name="Title 1">
+            <a:extLst>
+              <a:ext uri="{FF2B5EF4-FFF2-40B4-BE49-F238E27FC236}">
+                <a16:creationId xmlns:a16="http://schemas.microsoft.com/office/drawing/2014/main" id="{791B1049-D3CC-C27B-06D4-667088A5F887}"/>
+              </a:ext>
+            </a:extLst>
+          </p:cNvPr>
+          <p:cNvSpPr>
+            <a:spLocks noGrp="1"/>
+          </p:cNvSpPr>
+          <p:nvPr>
+            <p:ph type="title"/>
+          </p:nvPr>
+        </p:nvSpPr>
+        <p:spPr>
+          <a:xfrm>
+            <a:off x="152400" y="0"/>
+            <a:ext cx="8915400" cy="914400"/>
+          </a:xfrm>
+        </p:spPr>
+        <p:txBody>
+          <a:bodyPr>
+            <a:normAutofit fontScale="90000"/>
+          </a:bodyPr>
+          <a:lstStyle/>
+          <a:p>
+            <a:pPr algn="l"/>
+            <a:r>
+              <a:rPr lang="en-US" sz="3600" dirty="0"/>
+              <a:t>God’s Sovereignty vs. Human Responsibility</a:t>
+            </a:r>
+            <a:br>
+              <a:rPr lang="en-US" dirty="0"/>
+            </a:br>
+            <a:r>
+              <a:rPr lang="en-US" sz="2400" dirty="0">
+                <a:solidFill>
+                  <a:schemeClr val="tx2">
+                    <a:lumMod val="60000"/>
+                    <a:lumOff val="40000"/>
+                  </a:schemeClr>
+                </a:solidFill>
+              </a:rPr>
+              <a:t>God’s Purposes Will not Fail</a:t>
+            </a:r>
+          </a:p>
+        </p:txBody>
+      </p:sp>
+      <p:sp>
+        <p:nvSpPr>
+          <p:cNvPr id="3" name="TextBox 2">
+            <a:extLst>
+              <a:ext uri="{FF2B5EF4-FFF2-40B4-BE49-F238E27FC236}">
+                <a16:creationId xmlns:a16="http://schemas.microsoft.com/office/drawing/2014/main" id="{8C6422BC-75EC-9987-E553-27A0F5A81AB0}"/>
+              </a:ext>
+            </a:extLst>
+          </p:cNvPr>
+          <p:cNvSpPr txBox="1"/>
+          <p:nvPr/>
+        </p:nvSpPr>
+        <p:spPr>
+          <a:xfrm>
+            <a:off x="154577" y="1066800"/>
+            <a:ext cx="8665029" cy="1938992"/>
+          </a:xfrm>
+          <a:prstGeom prst="rect">
+            <a:avLst/>
+          </a:prstGeom>
+          <a:noFill/>
+        </p:spPr>
+        <p:txBody>
+          <a:bodyPr wrap="square" rtlCol="0">
+            <a:spAutoFit/>
+          </a:bodyPr>
+          <a:lstStyle/>
+          <a:p>
+            <a:r>
+              <a:rPr lang="en-US" sz="2000" b="1" i="1" dirty="0"/>
+              <a:t>Romans 8:26-30  </a:t>
+            </a:r>
+            <a:r>
+              <a:rPr lang="en-US" sz="2000" i="1" dirty="0"/>
+              <a:t>“And we know that all things work together for good to </a:t>
+            </a:r>
+            <a:r>
+              <a:rPr lang="en-US" sz="2000" b="1" i="1" u="sng" dirty="0"/>
+              <a:t>those who love God</a:t>
+            </a:r>
+            <a:r>
+              <a:rPr lang="en-US" sz="2000" i="1" dirty="0"/>
+              <a:t>, to </a:t>
+            </a:r>
+            <a:r>
+              <a:rPr lang="en-US" sz="2000" b="1" i="1" u="sng" dirty="0"/>
+              <a:t>those who </a:t>
+            </a:r>
+            <a:r>
+              <a:rPr lang="en-US" sz="2000" i="1" dirty="0"/>
+              <a:t>are called </a:t>
+            </a:r>
+            <a:r>
+              <a:rPr lang="en-US" sz="2000" b="1" i="1" u="sng" dirty="0"/>
+              <a:t>according to His purpose</a:t>
+            </a:r>
+            <a:r>
+              <a:rPr lang="en-US" sz="2000" i="1" dirty="0"/>
+              <a:t>.  For </a:t>
+            </a:r>
+            <a:r>
+              <a:rPr lang="en-US" sz="2000" b="1" i="1" u="sng" dirty="0"/>
+              <a:t>whom</a:t>
+            </a:r>
+            <a:r>
+              <a:rPr lang="en-US" sz="2000" i="1" dirty="0"/>
+              <a:t> </a:t>
+            </a:r>
+            <a:r>
+              <a:rPr lang="en-US" sz="2000" b="1" i="1" u="sng" dirty="0"/>
+              <a:t>He foreknew</a:t>
+            </a:r>
+            <a:r>
+              <a:rPr lang="en-US" sz="2000" i="1" dirty="0"/>
+              <a:t>, He also </a:t>
+            </a:r>
+            <a:r>
+              <a:rPr lang="en-US" sz="2000" b="1" u="sng" dirty="0"/>
+              <a:t>predestined</a:t>
+            </a:r>
+            <a:r>
+              <a:rPr lang="en-US" sz="2000" i="1" dirty="0"/>
+              <a:t> to be </a:t>
+            </a:r>
+            <a:r>
+              <a:rPr lang="en-US" sz="2000" b="1" i="1" u="sng" dirty="0"/>
+              <a:t>conformed to the image of His Son</a:t>
+            </a:r>
+            <a:r>
+              <a:rPr lang="en-US" sz="2000" i="1" dirty="0"/>
+              <a:t>, that He might be the firstborn among many brethren.  Moreover who He predestined, these </a:t>
+            </a:r>
+            <a:r>
+              <a:rPr lang="en-US" sz="2000" b="1" i="1" u="sng" dirty="0"/>
+              <a:t>He also called</a:t>
+            </a:r>
+            <a:r>
+              <a:rPr lang="en-US" sz="2000" i="1" dirty="0"/>
+              <a:t>; whom He called, these </a:t>
+            </a:r>
+            <a:r>
+              <a:rPr lang="en-US" sz="2000" b="1" i="1" u="sng" dirty="0"/>
+              <a:t>He also justified</a:t>
+            </a:r>
+            <a:r>
+              <a:rPr lang="en-US" sz="2000" i="1" dirty="0"/>
+              <a:t>; and whom He justified, these </a:t>
+            </a:r>
+            <a:r>
+              <a:rPr lang="en-US" sz="2000" b="1" i="1" u="sng" dirty="0"/>
+              <a:t>He also glorified</a:t>
+            </a:r>
+            <a:r>
+              <a:rPr lang="en-US" sz="2000" i="1" dirty="0"/>
+              <a:t>.”</a:t>
+            </a:r>
+          </a:p>
+        </p:txBody>
+      </p:sp>
+      <p:sp>
+        <p:nvSpPr>
+          <p:cNvPr id="4" name="TextBox 3">
+            <a:extLst>
+              <a:ext uri="{FF2B5EF4-FFF2-40B4-BE49-F238E27FC236}">
+                <a16:creationId xmlns:a16="http://schemas.microsoft.com/office/drawing/2014/main" id="{C063F511-FBD5-9228-9615-DD610075DFF2}"/>
+              </a:ext>
+            </a:extLst>
+          </p:cNvPr>
+          <p:cNvSpPr txBox="1"/>
+          <p:nvPr/>
+        </p:nvSpPr>
+        <p:spPr>
+          <a:xfrm>
+            <a:off x="228600" y="3186495"/>
+            <a:ext cx="8588828" cy="3447098"/>
+          </a:xfrm>
+          <a:prstGeom prst="rect">
+            <a:avLst/>
+          </a:prstGeom>
+          <a:noFill/>
+        </p:spPr>
+        <p:txBody>
+          <a:bodyPr wrap="square" rtlCol="0">
+            <a:spAutoFit/>
+          </a:bodyPr>
+          <a:lstStyle/>
+          <a:p>
+            <a:r>
+              <a:rPr lang="en-US" sz="2000" dirty="0"/>
+              <a:t>Paul ends chapter 8 with one of the strongest statements of covenant relationship assurance in Scripture…</a:t>
+            </a:r>
+          </a:p>
+          <a:p>
+            <a:r>
+              <a:rPr lang="en-US" sz="2000" i="1" dirty="0"/>
+              <a:t>	"Those whom he foreknew he also predestined..." </a:t>
+            </a:r>
+            <a:r>
+              <a:rPr lang="en-US" sz="2000" dirty="0"/>
+              <a:t>(Romans 8:29)</a:t>
+            </a:r>
+          </a:p>
+          <a:p>
+            <a:pPr marL="285750" indent="-285750">
+              <a:buFont typeface="Arial" panose="020B0604020202020204" pitchFamily="34" charset="0"/>
+              <a:buChar char="•"/>
+            </a:pPr>
+            <a:r>
+              <a:rPr lang="en-US" sz="2000" dirty="0"/>
+              <a:t>The emphasis is not on how people become Christians.</a:t>
+            </a:r>
+          </a:p>
+          <a:p>
+            <a:pPr marL="285750" indent="-285750">
+              <a:buFont typeface="Arial" panose="020B0604020202020204" pitchFamily="34" charset="0"/>
+              <a:buChar char="•"/>
+            </a:pPr>
+            <a:r>
+              <a:rPr lang="en-US" sz="2000" dirty="0"/>
+              <a:t>The emphasis is on God's ability to bring His people safely to glory.</a:t>
+            </a:r>
+          </a:p>
+          <a:p>
+            <a:pPr marL="285750" indent="-285750">
+              <a:buFont typeface="Arial" panose="020B0604020202020204" pitchFamily="34" charset="0"/>
+              <a:buChar char="•"/>
+            </a:pPr>
+            <a:r>
+              <a:rPr lang="en-US" sz="2000" dirty="0"/>
+              <a:t>The chain runs from foreknowledge to glorification.</a:t>
+            </a:r>
+          </a:p>
+          <a:p>
+            <a:pPr marL="285750" indent="-285750">
+              <a:buFont typeface="Arial" panose="020B0604020202020204" pitchFamily="34" charset="0"/>
+              <a:buChar char="•"/>
+            </a:pPr>
+            <a:r>
+              <a:rPr lang="en-US" sz="2000" dirty="0"/>
+              <a:t>God is the active subject throughout.</a:t>
+            </a:r>
+          </a:p>
+          <a:p>
+            <a:r>
+              <a:rPr lang="en-US" sz="2000" dirty="0"/>
+              <a:t>Paul's conclusion:</a:t>
+            </a:r>
+          </a:p>
+          <a:p>
+            <a:pPr marL="285750" indent="-285750">
+              <a:buFont typeface="Arial" panose="020B0604020202020204" pitchFamily="34" charset="0"/>
+              <a:buChar char="•"/>
+            </a:pPr>
+            <a:r>
+              <a:rPr lang="en-US" sz="2000" dirty="0"/>
+              <a:t>Nothing can separate God's people from His love.</a:t>
+            </a:r>
+          </a:p>
+          <a:p>
+            <a:pPr marL="285750" indent="-285750">
+              <a:buFont typeface="Arial" panose="020B0604020202020204" pitchFamily="34" charset="0"/>
+              <a:buChar char="•"/>
+            </a:pPr>
+            <a:r>
+              <a:rPr lang="en-US" sz="2000" dirty="0"/>
+              <a:t>This naturally raises a question.</a:t>
+            </a:r>
+          </a:p>
+          <a:p>
+            <a:pPr marL="742950" lvl="1" indent="-285750">
+              <a:buFont typeface="Arial" panose="020B0604020202020204" pitchFamily="34" charset="0"/>
+              <a:buChar char="•"/>
+            </a:pPr>
+            <a:r>
+              <a:rPr lang="en-US" sz="2000" dirty="0"/>
+              <a:t>If God is so faithful, what about Israel?</a:t>
+            </a:r>
+          </a:p>
+        </p:txBody>
+      </p:sp>
+    </p:spTree>
+    <p:extLst>
+      <p:ext uri="{BB962C8B-B14F-4D97-AF65-F5344CB8AC3E}">
+        <p14:creationId xmlns:p14="http://schemas.microsoft.com/office/powerpoint/2010/main" val="3266817840"/>
+      </p:ext>
+    </p:extLst>
+  </p:cSld>
+  <p:clrMapOvr>
+    <a:masterClrMapping/>
+  </p:clrMapOvr>
+  <p:timing>
+    <p:tnLst>
+      <p:par>
+        <p:cTn id="1" dur="indefinite" restart="never" nodeType="tmRoot">
+          <p:childTnLst>
+            <p:seq concurrent="1" nextAc="seek">
+              <p:cTn id="2" dur="indefinite" nodeType="mainSeq">
+                <p:childTnLst>
+                  <p:par>
+                    <p:cTn id="3" fill="hold">
+                      <p:stCondLst>
+                        <p:cond delay="indefinite"/>
+                      </p:stCondLst>
+                      <p:childTnLst>
+                        <p:par>
+                          <p:cTn id="4" fill="hold">
+                            <p:stCondLst>
+                              <p:cond delay="0"/>
+                            </p:stCondLst>
+                            <p:childTnLst>
+                              <p:par>
+                                <p:cTn id="5" presetID="42" presetClass="entr" presetSubtype="0" fill="hold" grpId="0" nodeType="clickEffect">
+                                  <p:stCondLst>
+                                    <p:cond delay="0"/>
+                                  </p:stCondLst>
+                                  <p:childTnLst>
+                                    <p:set>
+                                      <p:cBhvr>
+                                        <p:cTn id="6" dur="1" fill="hold">
+                                          <p:stCondLst>
+                                            <p:cond delay="0"/>
+                                          </p:stCondLst>
+                                        </p:cTn>
+                                        <p:tgtEl>
+                                          <p:spTgt spid="4"/>
+                                        </p:tgtEl>
+                                        <p:attrNameLst>
+                                          <p:attrName>style.visibility</p:attrName>
+                                        </p:attrNameLst>
+                                      </p:cBhvr>
+                                      <p:to>
+                                        <p:strVal val="visible"/>
+                                      </p:to>
+                                    </p:set>
+                                    <p:animEffect transition="in" filter="fade">
+                                      <p:cBhvr>
+                                        <p:cTn id="7" dur="1000"/>
+                                        <p:tgtEl>
+                                          <p:spTgt spid="4"/>
+                                        </p:tgtEl>
+                                      </p:cBhvr>
+                                    </p:animEffect>
+                                    <p:anim calcmode="lin" valueType="num">
+                                      <p:cBhvr>
+                                        <p:cTn id="8" dur="1000" fill="hold"/>
+                                        <p:tgtEl>
+                                          <p:spTgt spid="4"/>
+                                        </p:tgtEl>
+                                        <p:attrNameLst>
+                                          <p:attrName>ppt_x</p:attrName>
+                                        </p:attrNameLst>
+                                      </p:cBhvr>
+                                      <p:tavLst>
+                                        <p:tav tm="0">
+                                          <p:val>
+                                            <p:strVal val="#ppt_x"/>
+                                          </p:val>
+                                        </p:tav>
+                                        <p:tav tm="100000">
+                                          <p:val>
+                                            <p:strVal val="#ppt_x"/>
+                                          </p:val>
+                                        </p:tav>
+                                      </p:tavLst>
+                                    </p:anim>
+                                    <p:anim calcmode="lin" valueType="num">
+                                      <p:cBhvr>
+                                        <p:cTn id="9" dur="1000" fill="hold"/>
+                                        <p:tgtEl>
+                                          <p:spTgt spid="4"/>
+                                        </p:tgtEl>
+                                        <p:attrNameLst>
+                                          <p:attrName>ppt_y</p:attrName>
+                                        </p:attrNameLst>
+                                      </p:cBhvr>
+                                      <p:tavLst>
+                                        <p:tav tm="0">
+                                          <p:val>
+                                            <p:strVal val="#ppt_y+.1"/>
+                                          </p:val>
+                                        </p:tav>
+                                        <p:tav tm="100000">
+                                          <p:val>
+                                            <p:strVal val="#ppt_y"/>
+                                          </p:val>
+                                        </p:tav>
+                                      </p:tavLst>
+                                    </p:anim>
+                                  </p:childTnLst>
+                                </p:cTn>
+                              </p:par>
+                            </p:childTnLst>
+                          </p:cTn>
+                        </p:par>
+                      </p:childTnLst>
+                    </p:cTn>
+                  </p:par>
+                </p:childTnLst>
+              </p:cTn>
+              <p:prevCondLst>
+                <p:cond evt="onPrev" delay="0">
+                  <p:tgtEl>
+                    <p:sldTgt/>
+                  </p:tgtEl>
+                </p:cond>
+              </p:prevCondLst>
+              <p:nextCondLst>
+                <p:cond evt="onNext" delay="0">
+                  <p:tgtEl>
+                    <p:sldTgt/>
+                  </p:tgtEl>
+                </p:cond>
+              </p:nextCondLst>
+            </p:seq>
+          </p:childTnLst>
+        </p:cTn>
+      </p:par>
+    </p:tnLst>
+    <p:bldLst>
+      <p:bldP spid="4" grpId="0"/>
+    </p:bldLst>
+  </p:timing>
+</p:sld>
+</file>
+
+<file path=ppt/slides/slide4.xml><?xml version="1.0" encoding="utf-8"?>
+<p:sld xmlns:a="http://schemas.openxmlformats.org/drawingml/2006/main" xmlns:r="http://schemas.openxmlformats.org/officeDocument/2006/relationships" xmlns:p="http://schemas.openxmlformats.org/presentationml/2006/main">
+  <p:cSld>
+    <p:spTree>
+      <p:nvGrpSpPr>
+        <p:cNvPr id="1" name="">
+          <a:extLst>
+            <a:ext uri="{FF2B5EF4-FFF2-40B4-BE49-F238E27FC236}">
               <a16:creationId xmlns:a16="http://schemas.microsoft.com/office/drawing/2014/main" id="{0CAE5C25-4F58-DD38-CBE5-FB659D4FB8E4}"/>
             </a:ext>
           </a:extLst>
@@ -9089,464 +9555,6 @@
     <p:bldLst>
       <p:bldP spid="7" grpId="0"/>
       <p:bldP spid="3" grpId="0"/>
-    </p:bldLst>
-  </p:timing>
-</p:sld>
-</file>
-
-<file path=ppt/slides/slide4.xml><?xml version="1.0" encoding="utf-8"?>
-<p:sld xmlns:a="http://schemas.openxmlformats.org/drawingml/2006/main" xmlns:r="http://schemas.openxmlformats.org/officeDocument/2006/relationships" xmlns:p="http://schemas.openxmlformats.org/presentationml/2006/main">
-  <p:cSld>
-    <p:spTree>
-      <p:nvGrpSpPr>
-        <p:cNvPr id="1" name="">
-          <a:extLst>
-            <a:ext uri="{FF2B5EF4-FFF2-40B4-BE49-F238E27FC236}">
-              <a16:creationId xmlns:a16="http://schemas.microsoft.com/office/drawing/2014/main" id="{D66A4223-15CE-6B2B-EE49-167736EBB4C3}"/>
-            </a:ext>
-          </a:extLst>
-        </p:cNvPr>
-        <p:cNvGrpSpPr/>
-        <p:nvPr/>
-      </p:nvGrpSpPr>
-      <p:grpSpPr>
-        <a:xfrm>
-          <a:off x="0" y="0"/>
-          <a:ext cx="0" cy="0"/>
-          <a:chOff x="0" y="0"/>
-          <a:chExt cx="0" cy="0"/>
-        </a:xfrm>
-      </p:grpSpPr>
-      <p:sp>
-        <p:nvSpPr>
-          <p:cNvPr id="2" name="Title 1">
-            <a:extLst>
-              <a:ext uri="{FF2B5EF4-FFF2-40B4-BE49-F238E27FC236}">
-                <a16:creationId xmlns:a16="http://schemas.microsoft.com/office/drawing/2014/main" id="{791B1049-D3CC-C27B-06D4-667088A5F887}"/>
-              </a:ext>
-            </a:extLst>
-          </p:cNvPr>
-          <p:cNvSpPr>
-            <a:spLocks noGrp="1"/>
-          </p:cNvSpPr>
-          <p:nvPr>
-            <p:ph type="title"/>
-          </p:nvPr>
-        </p:nvSpPr>
-        <p:spPr>
-          <a:xfrm>
-            <a:off x="152400" y="0"/>
-            <a:ext cx="8915400" cy="914400"/>
-          </a:xfrm>
-        </p:spPr>
-        <p:txBody>
-          <a:bodyPr>
-            <a:normAutofit fontScale="90000"/>
-          </a:bodyPr>
-          <a:lstStyle/>
-          <a:p>
-            <a:pPr algn="l"/>
-            <a:r>
-              <a:rPr lang="en-US" sz="3600" dirty="0"/>
-              <a:t>God’s Sovereignty vs. Human Responsibility</a:t>
-            </a:r>
-            <a:br>
-              <a:rPr lang="en-US" dirty="0"/>
-            </a:br>
-            <a:r>
-              <a:rPr lang="en-US" sz="2400" dirty="0">
-                <a:solidFill>
-                  <a:schemeClr val="tx2">
-                    <a:lumMod val="60000"/>
-                    <a:lumOff val="40000"/>
-                  </a:schemeClr>
-                </a:solidFill>
-              </a:rPr>
-              <a:t>God’s Purposes Will not Fail</a:t>
-            </a:r>
-          </a:p>
-        </p:txBody>
-      </p:sp>
-      <p:sp>
-        <p:nvSpPr>
-          <p:cNvPr id="3" name="TextBox 2">
-            <a:extLst>
-              <a:ext uri="{FF2B5EF4-FFF2-40B4-BE49-F238E27FC236}">
-                <a16:creationId xmlns:a16="http://schemas.microsoft.com/office/drawing/2014/main" id="{8C6422BC-75EC-9987-E553-27A0F5A81AB0}"/>
-              </a:ext>
-            </a:extLst>
-          </p:cNvPr>
-          <p:cNvSpPr txBox="1"/>
-          <p:nvPr/>
-        </p:nvSpPr>
-        <p:spPr>
-          <a:xfrm>
-            <a:off x="154577" y="1066800"/>
-            <a:ext cx="8665029" cy="1938992"/>
-          </a:xfrm>
-          <a:prstGeom prst="rect">
-            <a:avLst/>
-          </a:prstGeom>
-          <a:noFill/>
-        </p:spPr>
-        <p:txBody>
-          <a:bodyPr wrap="square" rtlCol="0">
-            <a:spAutoFit/>
-          </a:bodyPr>
-          <a:lstStyle/>
-          <a:p>
-            <a:r>
-              <a:rPr lang="en-US" sz="2000" b="1" i="1" dirty="0"/>
-              <a:t>Romans 8:26-30  </a:t>
-            </a:r>
-            <a:r>
-              <a:rPr lang="en-US" sz="2000" i="1" dirty="0"/>
-              <a:t>“And we know that all things work together for good to </a:t>
-            </a:r>
-            <a:r>
-              <a:rPr lang="en-US" sz="2000" b="1" i="1" u="sng" dirty="0"/>
-              <a:t>those who love God</a:t>
-            </a:r>
-            <a:r>
-              <a:rPr lang="en-US" sz="2000" i="1" dirty="0"/>
-              <a:t>, to </a:t>
-            </a:r>
-            <a:r>
-              <a:rPr lang="en-US" sz="2000" b="1" i="1" u="sng" dirty="0"/>
-              <a:t>those who </a:t>
-            </a:r>
-            <a:r>
-              <a:rPr lang="en-US" sz="2000" i="1" dirty="0"/>
-              <a:t>are called </a:t>
-            </a:r>
-            <a:r>
-              <a:rPr lang="en-US" sz="2000" b="1" i="1" u="sng" dirty="0"/>
-              <a:t>according to His purpose</a:t>
-            </a:r>
-            <a:r>
-              <a:rPr lang="en-US" sz="2000" i="1" dirty="0"/>
-              <a:t>.  For </a:t>
-            </a:r>
-            <a:r>
-              <a:rPr lang="en-US" sz="2000" b="1" i="1" u="sng" dirty="0"/>
-              <a:t>whom</a:t>
-            </a:r>
-            <a:r>
-              <a:rPr lang="en-US" sz="2000" i="1" dirty="0"/>
-              <a:t> </a:t>
-            </a:r>
-            <a:r>
-              <a:rPr lang="en-US" sz="2000" b="1" i="1" u="sng" dirty="0"/>
-              <a:t>He foreknew</a:t>
-            </a:r>
-            <a:r>
-              <a:rPr lang="en-US" sz="2000" i="1" dirty="0"/>
-              <a:t>, He also </a:t>
-            </a:r>
-            <a:r>
-              <a:rPr lang="en-US" sz="2000" b="1" u="sng" dirty="0"/>
-              <a:t>predestined</a:t>
-            </a:r>
-            <a:r>
-              <a:rPr lang="en-US" sz="2000" i="1" dirty="0"/>
-              <a:t> to be </a:t>
-            </a:r>
-            <a:r>
-              <a:rPr lang="en-US" sz="2000" b="1" i="1" u="sng" dirty="0"/>
-              <a:t>conformed to the image of His Son</a:t>
-            </a:r>
-            <a:r>
-              <a:rPr lang="en-US" sz="2000" i="1" dirty="0"/>
-              <a:t>, that He might be the firstborn among many brethren.  Moreover who He predestined, these </a:t>
-            </a:r>
-            <a:r>
-              <a:rPr lang="en-US" sz="2000" b="1" i="1" u="sng" dirty="0"/>
-              <a:t>He also called</a:t>
-            </a:r>
-            <a:r>
-              <a:rPr lang="en-US" sz="2000" i="1" dirty="0"/>
-              <a:t>; whom He called, these </a:t>
-            </a:r>
-            <a:r>
-              <a:rPr lang="en-US" sz="2000" b="1" i="1" u="sng" dirty="0"/>
-              <a:t>He also justified</a:t>
-            </a:r>
-            <a:r>
-              <a:rPr lang="en-US" sz="2000" i="1" dirty="0"/>
-              <a:t>; and whom He justified, these </a:t>
-            </a:r>
-            <a:r>
-              <a:rPr lang="en-US" sz="2000" b="1" i="1" u="sng" dirty="0"/>
-              <a:t>He also glorified</a:t>
-            </a:r>
-            <a:r>
-              <a:rPr lang="en-US" sz="2000" i="1" dirty="0"/>
-              <a:t>.”</a:t>
-            </a:r>
-          </a:p>
-        </p:txBody>
-      </p:sp>
-      <p:sp>
-        <p:nvSpPr>
-          <p:cNvPr id="4" name="TextBox 3">
-            <a:extLst>
-              <a:ext uri="{FF2B5EF4-FFF2-40B4-BE49-F238E27FC236}">
-                <a16:creationId xmlns:a16="http://schemas.microsoft.com/office/drawing/2014/main" id="{C063F511-FBD5-9228-9615-DD610075DFF2}"/>
-              </a:ext>
-            </a:extLst>
-          </p:cNvPr>
-          <p:cNvSpPr txBox="1"/>
-          <p:nvPr/>
-        </p:nvSpPr>
-        <p:spPr>
-          <a:xfrm>
-            <a:off x="228600" y="3186495"/>
-            <a:ext cx="8588828" cy="3447098"/>
-          </a:xfrm>
-          <a:prstGeom prst="rect">
-            <a:avLst/>
-          </a:prstGeom>
-          <a:noFill/>
-        </p:spPr>
-        <p:txBody>
-          <a:bodyPr wrap="square" rtlCol="0">
-            <a:spAutoFit/>
-          </a:bodyPr>
-          <a:lstStyle/>
-          <a:p>
-            <a:r>
-              <a:rPr lang="en-US" sz="2000" dirty="0"/>
-              <a:t>Paul ends chapter 8 with one of the strongest statements of covenant relationship assurance in Scripture…</a:t>
-            </a:r>
-          </a:p>
-          <a:p>
-            <a:r>
-              <a:rPr lang="en-US" sz="2000" i="1" dirty="0"/>
-              <a:t>	"Those whom he foreknew he also predestined..." </a:t>
-            </a:r>
-            <a:r>
-              <a:rPr lang="en-US" sz="2000" dirty="0"/>
-              <a:t>(Romans 8:29)</a:t>
-            </a:r>
-          </a:p>
-          <a:p>
-            <a:pPr marL="285750" indent="-285750">
-              <a:buFont typeface="Arial" panose="020B0604020202020204" pitchFamily="34" charset="0"/>
-              <a:buChar char="•"/>
-            </a:pPr>
-            <a:r>
-              <a:rPr lang="en-US" sz="2000" dirty="0"/>
-              <a:t>The emphasis is not on how people become Christians.</a:t>
-            </a:r>
-          </a:p>
-          <a:p>
-            <a:pPr marL="285750" indent="-285750">
-              <a:buFont typeface="Arial" panose="020B0604020202020204" pitchFamily="34" charset="0"/>
-              <a:buChar char="•"/>
-            </a:pPr>
-            <a:r>
-              <a:rPr lang="en-US" sz="2000" dirty="0"/>
-              <a:t>The emphasis is on God's ability to bring His people safely to glory.</a:t>
-            </a:r>
-          </a:p>
-          <a:p>
-            <a:pPr marL="285750" indent="-285750">
-              <a:buFont typeface="Arial" panose="020B0604020202020204" pitchFamily="34" charset="0"/>
-              <a:buChar char="•"/>
-            </a:pPr>
-            <a:r>
-              <a:rPr lang="en-US" sz="2000" dirty="0"/>
-              <a:t>The chain runs from foreknowledge to glorification.</a:t>
-            </a:r>
-          </a:p>
-          <a:p>
-            <a:pPr marL="285750" indent="-285750">
-              <a:buFont typeface="Arial" panose="020B0604020202020204" pitchFamily="34" charset="0"/>
-              <a:buChar char="•"/>
-            </a:pPr>
-            <a:r>
-              <a:rPr lang="en-US" sz="2000" dirty="0"/>
-              <a:t>God is the active subject throughout.</a:t>
-            </a:r>
-          </a:p>
-          <a:p>
-            <a:r>
-              <a:rPr lang="en-US" sz="2000" dirty="0"/>
-              <a:t>Paul's conclusion:</a:t>
-            </a:r>
-          </a:p>
-          <a:p>
-            <a:pPr marL="285750" indent="-285750">
-              <a:buFont typeface="Arial" panose="020B0604020202020204" pitchFamily="34" charset="0"/>
-              <a:buChar char="•"/>
-            </a:pPr>
-            <a:r>
-              <a:rPr lang="en-US" sz="2000" dirty="0"/>
-              <a:t>Nothing can separate God's people from His love.</a:t>
-            </a:r>
-          </a:p>
-          <a:p>
-            <a:pPr marL="285750" indent="-285750">
-              <a:buFont typeface="Arial" panose="020B0604020202020204" pitchFamily="34" charset="0"/>
-              <a:buChar char="•"/>
-            </a:pPr>
-            <a:r>
-              <a:rPr lang="en-US" sz="2000" dirty="0"/>
-              <a:t>This naturally raises a question.</a:t>
-            </a:r>
-          </a:p>
-          <a:p>
-            <a:pPr marL="742950" lvl="1" indent="-285750">
-              <a:buFont typeface="Arial" panose="020B0604020202020204" pitchFamily="34" charset="0"/>
-              <a:buChar char="•"/>
-            </a:pPr>
-            <a:r>
-              <a:rPr lang="en-US" sz="2000" dirty="0"/>
-              <a:t>If God is so faithful, what about Israel?</a:t>
-            </a:r>
-          </a:p>
-        </p:txBody>
-      </p:sp>
-    </p:spTree>
-    <p:extLst>
-      <p:ext uri="{BB962C8B-B14F-4D97-AF65-F5344CB8AC3E}">
-        <p14:creationId xmlns:p14="http://schemas.microsoft.com/office/powerpoint/2010/main" val="3266817840"/>
-      </p:ext>
-    </p:extLst>
-  </p:cSld>
-  <p:clrMapOvr>
-    <a:masterClrMapping/>
-  </p:clrMapOvr>
-  <p:timing>
-    <p:tnLst>
-      <p:par>
-        <p:cTn id="1" dur="indefinite" restart="never" nodeType="tmRoot">
-          <p:childTnLst>
-            <p:seq concurrent="1" nextAc="seek">
-              <p:cTn id="2" dur="indefinite" nodeType="mainSeq">
-                <p:childTnLst>
-                  <p:par>
-                    <p:cTn id="3" fill="hold">
-                      <p:stCondLst>
-                        <p:cond delay="indefinite"/>
-                      </p:stCondLst>
-                      <p:childTnLst>
-                        <p:par>
-                          <p:cTn id="4" fill="hold">
-                            <p:stCondLst>
-                              <p:cond delay="0"/>
-                            </p:stCondLst>
-                            <p:childTnLst>
-                              <p:par>
-                                <p:cTn id="5" presetID="42" presetClass="entr" presetSubtype="0" fill="hold" grpId="0" nodeType="clickEffect">
-                                  <p:stCondLst>
-                                    <p:cond delay="0"/>
-                                  </p:stCondLst>
-                                  <p:childTnLst>
-                                    <p:set>
-                                      <p:cBhvr>
-                                        <p:cTn id="6" dur="1" fill="hold">
-                                          <p:stCondLst>
-                                            <p:cond delay="0"/>
-                                          </p:stCondLst>
-                                        </p:cTn>
-                                        <p:tgtEl>
-                                          <p:spTgt spid="4"/>
-                                        </p:tgtEl>
-                                        <p:attrNameLst>
-                                          <p:attrName>style.visibility</p:attrName>
-                                        </p:attrNameLst>
-                                      </p:cBhvr>
-                                      <p:to>
-                                        <p:strVal val="visible"/>
-                                      </p:to>
-                                    </p:set>
-                                    <p:animEffect transition="in" filter="fade">
-                                      <p:cBhvr>
-                                        <p:cTn id="7" dur="1000"/>
-                                        <p:tgtEl>
-                                          <p:spTgt spid="4"/>
-                                        </p:tgtEl>
-                                      </p:cBhvr>
-                                    </p:animEffect>
-                                    <p:anim calcmode="lin" valueType="num">
-                                      <p:cBhvr>
-                                        <p:cTn id="8" dur="1000" fill="hold"/>
-                                        <p:tgtEl>
-                                          <p:spTgt spid="4"/>
-                                        </p:tgtEl>
-                                        <p:attrNameLst>
-                                          <p:attrName>ppt_x</p:attrName>
-                                        </p:attrNameLst>
-                                      </p:cBhvr>
-                                      <p:tavLst>
-                                        <p:tav tm="0">
-                                          <p:val>
-                                            <p:strVal val="#ppt_x"/>
-                                          </p:val>
-                                        </p:tav>
-                                        <p:tav tm="100000">
-                                          <p:val>
-                                            <p:strVal val="#ppt_x"/>
-                                          </p:val>
-                                        </p:tav>
-                                      </p:tavLst>
-                                    </p:anim>
-                                    <p:anim calcmode="lin" valueType="num">
-                                      <p:cBhvr>
-                                        <p:cTn id="9" dur="1000" fill="hold"/>
-                                        <p:tgtEl>
-                                          <p:spTgt spid="4"/>
-                                        </p:tgtEl>
-                                        <p:attrNameLst>
-                                          <p:attrName>ppt_y</p:attrName>
-                                        </p:attrNameLst>
-                                      </p:cBhvr>
-                                      <p:tavLst>
-                                        <p:tav tm="0">
-                                          <p:val>
-                                            <p:strVal val="#ppt_y+.1"/>
-                                          </p:val>
-                                        </p:tav>
-                                        <p:tav tm="100000">
-                                          <p:val>
-                                            <p:strVal val="#ppt_y"/>
-                                          </p:val>
-                                        </p:tav>
-                                      </p:tavLst>
-                                    </p:anim>
-                                  </p:childTnLst>
-                                </p:cTn>
-                              </p:par>
-                            </p:childTnLst>
-                          </p:cTn>
-                        </p:par>
-                      </p:childTnLst>
-                    </p:cTn>
-                  </p:par>
-                </p:childTnLst>
-              </p:cTn>
-              <p:prevCondLst>
-                <p:cond evt="onPrev" delay="0">
-                  <p:tgtEl>
-                    <p:sldTgt/>
-                  </p:tgtEl>
-                </p:cond>
-              </p:prevCondLst>
-              <p:nextCondLst>
-                <p:cond evt="onNext" delay="0">
-                  <p:tgtEl>
-                    <p:sldTgt/>
-                  </p:tgtEl>
-                </p:cond>
-              </p:nextCondLst>
-            </p:seq>
-          </p:childTnLst>
-        </p:cTn>
-      </p:par>
-    </p:tnLst>
-    <p:bldLst>
-      <p:bldP spid="4" grpId="0"/>
     </p:bldLst>
   </p:timing>
 </p:sld>
@@ -11223,11 +11231,18 @@
               <a:t>Example understanding that we </a:t>
             </a:r>
             <a:r>
+              <a:rPr lang="en-US" sz="2400" b="1" i="1" dirty="0">
+                <a:latin typeface="Segoe UI" panose="020B0502040204020203" pitchFamily="34" charset="0"/>
+                <a:cs typeface="Segoe UI" panose="020B0502040204020203" pitchFamily="34" charset="0"/>
+              </a:rPr>
+              <a:t>ought</a:t>
+            </a:r>
+            <a:r>
               <a:rPr lang="en-US" sz="2400" i="1" dirty="0">
                 <a:latin typeface="Segoe UI" panose="020B0502040204020203" pitchFamily="34" charset="0"/>
                 <a:cs typeface="Segoe UI" panose="020B0502040204020203" pitchFamily="34" charset="0"/>
               </a:rPr>
-              <a:t>ought to </a:t>
+              <a:t> to </a:t>
             </a:r>
             <a:r>
               <a:rPr lang="en-US" sz="2400" dirty="0">
